--- a/assets/figures-editable/c1-c2/c1-e28.pptx
+++ b/assets/figures-editable/c1-c2/c1-e28.pptx
@@ -7,7 +7,7 @@
   <p:sldIdLst>
     <p:sldId id="256" r:id="rId7"/>
   </p:sldIdLst>
-  <p:sldSz cx="11948160" cy="7924799" type="screen4x3"/>
+  <p:sldSz cx="12191695" cy="6858000" type="screen4x3"/>
   <p:notesSz cx="6858000" cy="9144000"/>
   <p:defaultTextStyle>
     <a:defPPr>
@@ -3098,14 +3098,14 @@
       <p:grpSpPr/>
       <p:sp>
         <p:nvSpPr>
-          <p:cNvPr id="2" name="text1" descr="sci-ppt:C1-E28-001"/>
+          <p:cNvPr id="2" name="C1-E28 text 0" descr="sci-ppt:o000"/>
           <p:cNvSpPr txBox="1"/>
           <p:nvPr/>
         </p:nvSpPr>
         <p:spPr>
           <a:xfrm>
-            <a:off x="316992" y="268224"/>
-            <a:ext cx="11277600" cy="359054"/>
+            <a:off x="274320" y="118872"/>
+            <a:ext cx="11612880" cy="340105"/>
           </a:xfrm>
           <a:prstGeom prst="rect">
             <a:avLst/>
@@ -3114,7 +3114,7 @@
           <a:effectLst/>
         </p:spPr>
         <p:txBody>
-          <a:bodyPr wrap="none" lIns="27432" rIns="27432" tIns="18288" bIns="18288" anchor="ctr">
+          <a:bodyPr wrap="none" lIns="18288" rIns="18288" tIns="18288" bIns="18288" anchor="t">
             <a:spAutoFit/>
           </a:bodyPr>
           <a:lstStyle/>
@@ -3125,33 +3125,491 @@
               </a:spcAft>
             </a:pPr>
             <a:r>
-              <a:rPr sz="1823" b="0" i="0">
+              <a:rPr sz="1900" b="1" i="0">
                 <a:solidFill>
                   <a:srgbClr val="8EDBD4"/>
                 </a:solidFill>
                 <a:latin typeface="Arial"/>
               </a:rPr>
-              <a:t>C1-E28 | Physical-variable diagram</a:t>
-            </a:r>
-          </a:p>
-        </p:txBody>
-      </p:sp>
-      <p:sp>
-        <p:nvSpPr>
-          <p:cNvPr id="3" name="rect2" descr="sci-ppt:C1-E28-002"/>
+              <a:t>C1-E28 · Kinematic condition and clean-interface traction</a:t>
+            </a:r>
+          </a:p>
+        </p:txBody>
+      </p:sp>
+      <p:sp>
+        <p:nvSpPr>
+          <p:cNvPr id="3" name="C1-E28 round_rect 1" descr="sci-ppt:o001"/>
           <p:cNvSpPr/>
           <p:nvPr/>
         </p:nvSpPr>
         <p:spPr>
           <a:xfrm>
-            <a:off x="1341120" y="1524000"/>
-            <a:ext cx="9144000" cy="2438400"/>
+            <a:off x="365760" y="914400"/>
+            <a:ext cx="4937760" cy="4937760"/>
+          </a:xfrm>
+          <a:prstGeom prst="roundRect">
+            <a:avLst/>
+          </a:prstGeom>
+          <a:solidFill>
+            <a:srgbClr val="213E4B"/>
+          </a:solidFill>
+          <a:ln w="20320">
+            <a:solidFill>
+              <a:srgbClr val="8EDBD4"/>
+            </a:solidFill>
+          </a:ln>
+          <a:effectLst/>
+        </p:spPr>
+        <p:txBody>
+          <a:bodyPr rtlCol="0" anchor="ctr"/>
+          <a:lstStyle/>
+          <a:p>
+            <a:pPr algn="ctr"/>
+          </a:p>
+        </p:txBody>
+      </p:sp>
+      <p:sp>
+        <p:nvSpPr>
+          <p:cNvPr id="4" name="C1-E28 text 2" descr="sci-ppt:o002"/>
+          <p:cNvSpPr txBox="1"/>
+          <p:nvPr/>
+        </p:nvSpPr>
+        <p:spPr>
+          <a:xfrm>
+            <a:off x="475488" y="969264"/>
+            <a:ext cx="4718304" cy="254889"/>
           </a:xfrm>
           <a:prstGeom prst="rect">
             <a:avLst/>
           </a:prstGeom>
           <a:noFill/>
-          <a:ln w="19050">
+          <a:effectLst/>
+        </p:spPr>
+        <p:txBody>
+          <a:bodyPr wrap="none" lIns="18288" rIns="18288" tIns="18288" bIns="18288" anchor="t">
+            <a:spAutoFit/>
+          </a:bodyPr>
+          <a:lstStyle/>
+          <a:p>
+            <a:pPr algn="l">
+              <a:spcAft>
+                <a:spcPts val="0"/>
+              </a:spcAft>
+            </a:pPr>
+            <a:r>
+              <a:rPr sz="1350" b="1" i="0">
+                <a:solidFill>
+                  <a:srgbClr val="8EDBD4"/>
+                </a:solidFill>
+                <a:latin typeface="Arial"/>
+              </a:rPr>
+              <a:t>Interface patch and conventions</a:t>
+            </a:r>
+          </a:p>
+        </p:txBody>
+      </p:sp>
+      <p:sp>
+        <p:nvSpPr>
+          <p:cNvPr id="5" name="C1-E28 ellipse 3" descr="sci-ppt:o003"/>
+          <p:cNvSpPr/>
+          <p:nvPr/>
+        </p:nvSpPr>
+        <p:spPr>
+          <a:xfrm>
+            <a:off x="1188719" y="1965960"/>
+            <a:ext cx="3108960" cy="3108960"/>
+          </a:xfrm>
+          <a:prstGeom prst="ellipse">
+            <a:avLst/>
+          </a:prstGeom>
+          <a:solidFill>
+            <a:srgbClr val="1E4A5A"/>
+          </a:solidFill>
+          <a:ln w="12700">
+            <a:solidFill>
+              <a:srgbClr val="2B6678"/>
+            </a:solidFill>
+          </a:ln>
+          <a:effectLst/>
+        </p:spPr>
+        <p:txBody>
+          <a:bodyPr rtlCol="0" anchor="ctr"/>
+          <a:lstStyle/>
+          <a:p>
+            <a:pPr algn="ctr"/>
+          </a:p>
+        </p:txBody>
+      </p:sp>
+      <p:sp>
+        <p:nvSpPr>
+          <p:cNvPr id="6" name="C1-E28 ellipse 4" descr="sci-ppt:o004"/>
+          <p:cNvSpPr/>
+          <p:nvPr/>
+        </p:nvSpPr>
+        <p:spPr>
+          <a:xfrm>
+            <a:off x="1554480" y="2331720"/>
+            <a:ext cx="2377440" cy="2377440"/>
+          </a:xfrm>
+          <a:prstGeom prst="ellipse">
+            <a:avLst/>
+          </a:prstGeom>
+          <a:solidFill>
+            <a:srgbClr val="0C1820"/>
+          </a:solidFill>
+          <a:ln w="27940">
+            <a:solidFill>
+              <a:srgbClr val="F2B880"/>
+            </a:solidFill>
+          </a:ln>
+          <a:effectLst/>
+        </p:spPr>
+        <p:txBody>
+          <a:bodyPr rtlCol="0" anchor="ctr"/>
+          <a:lstStyle/>
+          <a:p>
+            <a:pPr algn="ctr"/>
+          </a:p>
+        </p:txBody>
+      </p:sp>
+      <p:cxnSp>
+        <p:nvCxnSpPr>
+          <p:cNvPr id="7" name="C1-E28 arrow 5" descr="sci-ppt:o005"/>
+          <p:cNvCxnSpPr/>
+          <p:nvPr/>
+        </p:nvCxnSpPr>
+        <p:spPr>
+          <a:xfrm flipH="1">
+            <a:off x="3080264" y="2838618"/>
+            <a:ext cx="636678" cy="445806"/>
+          </a:xfrm>
+          <a:prstGeom prst="line">
+            <a:avLst/>
+          </a:prstGeom>
+          <a:ln w="38100">
+            <a:solidFill>
+              <a:srgbClr val="F28BA0"/>
+            </a:solidFill>
+            <a:headEnd type="none" w="med" len="med"/>
+            <a:tailEnd type="triangle" w="med" len="med"/>
+          </a:ln>
+          <a:effectLst/>
+        </p:spPr>
+      </p:cxnSp>
+      <p:cxnSp>
+        <p:nvCxnSpPr>
+          <p:cNvPr id="8" name="C1-E28 arrow 6" descr="sci-ppt:o006"/>
+          <p:cNvCxnSpPr/>
+          <p:nvPr/>
+        </p:nvCxnSpPr>
+        <p:spPr>
+          <a:xfrm flipH="1" flipV="1">
+            <a:off x="3349807" y="2314295"/>
+            <a:ext cx="367135" cy="524323"/>
+          </a:xfrm>
+          <a:prstGeom prst="line">
+            <a:avLst/>
+          </a:prstGeom>
+          <a:ln w="30480">
+            <a:solidFill>
+              <a:srgbClr val="7FC8F8"/>
+            </a:solidFill>
+            <a:headEnd type="none" w="med" len="med"/>
+            <a:tailEnd type="triangle" w="med" len="med"/>
+          </a:ln>
+          <a:effectLst/>
+        </p:spPr>
+      </p:cxnSp>
+      <p:cxnSp>
+        <p:nvCxnSpPr>
+          <p:cNvPr id="9" name="C1-E28 arrow 7" descr="sci-ppt:o007"/>
+          <p:cNvCxnSpPr/>
+          <p:nvPr/>
+        </p:nvCxnSpPr>
+        <p:spPr>
+          <a:xfrm>
+            <a:off x="2240825" y="2443093"/>
+            <a:ext cx="328476" cy="704419"/>
+          </a:xfrm>
+          <a:prstGeom prst="line">
+            <a:avLst/>
+          </a:prstGeom>
+          <a:ln w="38100">
+            <a:solidFill>
+              <a:srgbClr val="F28BA0"/>
+            </a:solidFill>
+            <a:headEnd type="none" w="med" len="med"/>
+            <a:tailEnd type="triangle" w="med" len="med"/>
+          </a:ln>
+          <a:effectLst/>
+        </p:spPr>
+      </p:cxnSp>
+      <p:cxnSp>
+        <p:nvCxnSpPr>
+          <p:cNvPr id="10" name="C1-E28 arrow 8" descr="sci-ppt:o008"/>
+          <p:cNvCxnSpPr/>
+          <p:nvPr/>
+        </p:nvCxnSpPr>
+        <p:spPr>
+          <a:xfrm flipH="1">
+            <a:off x="1660715" y="2443093"/>
+            <a:ext cx="580110" cy="270510"/>
+          </a:xfrm>
+          <a:prstGeom prst="line">
+            <a:avLst/>
+          </a:prstGeom>
+          <a:ln w="30480">
+            <a:solidFill>
+              <a:srgbClr val="7FC8F8"/>
+            </a:solidFill>
+            <a:headEnd type="none" w="med" len="med"/>
+            <a:tailEnd type="triangle" w="med" len="med"/>
+          </a:ln>
+          <a:effectLst/>
+        </p:spPr>
+      </p:cxnSp>
+      <p:cxnSp>
+        <p:nvCxnSpPr>
+          <p:cNvPr id="11" name="C1-E28 arrow 9" descr="sci-ppt:o009"/>
+          <p:cNvCxnSpPr/>
+          <p:nvPr/>
+        </p:nvCxnSpPr>
+        <p:spPr>
+          <a:xfrm flipV="1">
+            <a:off x="1626168" y="3661174"/>
+            <a:ext cx="730367" cy="265832"/>
+          </a:xfrm>
+          <a:prstGeom prst="line">
+            <a:avLst/>
+          </a:prstGeom>
+          <a:ln w="38100">
+            <a:solidFill>
+              <a:srgbClr val="F28BA0"/>
+            </a:solidFill>
+            <a:headEnd type="none" w="med" len="med"/>
+            <a:tailEnd type="triangle" w="med" len="med"/>
+          </a:ln>
+          <a:effectLst/>
+        </p:spPr>
+      </p:cxnSp>
+      <p:cxnSp>
+        <p:nvCxnSpPr>
+          <p:cNvPr id="12" name="C1-E28 arrow 10" descr="sci-ppt:o010"/>
+          <p:cNvCxnSpPr/>
+          <p:nvPr/>
+        </p:nvCxnSpPr>
+        <p:spPr>
+          <a:xfrm>
+            <a:off x="1626168" y="3927006"/>
+            <a:ext cx="218920" cy="601478"/>
+          </a:xfrm>
+          <a:prstGeom prst="line">
+            <a:avLst/>
+          </a:prstGeom>
+          <a:ln w="30480">
+            <a:solidFill>
+              <a:srgbClr val="7FC8F8"/>
+            </a:solidFill>
+            <a:headEnd type="none" w="med" len="med"/>
+            <a:tailEnd type="triangle" w="med" len="med"/>
+          </a:ln>
+          <a:effectLst/>
+        </p:spPr>
+      </p:cxnSp>
+      <p:sp>
+        <p:nvSpPr>
+          <p:cNvPr id="13" name="C1-E28 text 11" descr="sci-ppt:o011"/>
+          <p:cNvSpPr txBox="1"/>
+          <p:nvPr/>
+        </p:nvSpPr>
+        <p:spPr>
+          <a:xfrm>
+            <a:off x="3749039" y="1645920"/>
+            <a:ext cx="2377440" cy="247142"/>
+          </a:xfrm>
+          <a:prstGeom prst="rect">
+            <a:avLst/>
+          </a:prstGeom>
+          <a:noFill/>
+          <a:effectLst/>
+        </p:spPr>
+        <p:txBody>
+          <a:bodyPr wrap="none" lIns="18288" rIns="18288" tIns="18288" bIns="18288" anchor="t">
+            <a:spAutoFit/>
+          </a:bodyPr>
+          <a:lstStyle/>
+          <a:p>
+            <a:pPr algn="l">
+              <a:spcAft>
+                <a:spcPts val="0"/>
+              </a:spcAft>
+            </a:pPr>
+            <a:r>
+              <a:rPr sz="1300" b="1" i="0">
+                <a:solidFill>
+                  <a:srgbClr val="F28BA0"/>
+                </a:solidFill>
+                <a:latin typeface="Arial"/>
+              </a:rPr>
+              <a:t>n: liquid → gas</a:t>
+            </a:r>
+          </a:p>
+        </p:txBody>
+      </p:sp>
+      <p:sp>
+        <p:nvSpPr>
+          <p:cNvPr id="14" name="C1-E28 text 12" descr="sci-ppt:o012"/>
+          <p:cNvSpPr txBox="1"/>
+          <p:nvPr/>
+        </p:nvSpPr>
+        <p:spPr>
+          <a:xfrm>
+            <a:off x="4023360" y="2194560"/>
+            <a:ext cx="2377440" cy="247142"/>
+          </a:xfrm>
+          <a:prstGeom prst="rect">
+            <a:avLst/>
+          </a:prstGeom>
+          <a:noFill/>
+          <a:effectLst/>
+        </p:spPr>
+        <p:txBody>
+          <a:bodyPr wrap="none" lIns="18288" rIns="18288" tIns="18288" bIns="18288" anchor="t">
+            <a:spAutoFit/>
+          </a:bodyPr>
+          <a:lstStyle/>
+          <a:p>
+            <a:pPr algn="l">
+              <a:spcAft>
+                <a:spcPts val="0"/>
+              </a:spcAft>
+            </a:pPr>
+            <a:r>
+              <a:rPr sz="1300" b="1" i="0">
+                <a:solidFill>
+                  <a:srgbClr val="7FC8F8"/>
+                </a:solidFill>
+                <a:latin typeface="Arial"/>
+              </a:rPr>
+              <a:t>s: tangent</a:t>
+            </a:r>
+          </a:p>
+        </p:txBody>
+      </p:sp>
+      <p:sp>
+        <p:nvSpPr>
+          <p:cNvPr id="15" name="C1-E28 text 13" descr="sci-ppt:o013"/>
+          <p:cNvSpPr txBox="1"/>
+          <p:nvPr/>
+        </p:nvSpPr>
+        <p:spPr>
+          <a:xfrm>
+            <a:off x="502920" y="5257800"/>
+            <a:ext cx="4663440" cy="433070"/>
+          </a:xfrm>
+          <a:prstGeom prst="rect">
+            <a:avLst/>
+          </a:prstGeom>
+          <a:noFill/>
+          <a:effectLst/>
+        </p:spPr>
+        <p:txBody>
+          <a:bodyPr wrap="none" lIns="18288" rIns="18288" tIns="18288" bIns="18288" anchor="t">
+            <a:spAutoFit/>
+          </a:bodyPr>
+          <a:lstStyle/>
+          <a:p>
+            <a:pPr algn="l">
+              <a:spcAft>
+                <a:spcPts val="0"/>
+              </a:spcAft>
+            </a:pPr>
+            <a:r>
+              <a:rPr sz="1250" b="0" i="0">
+                <a:solidFill>
+                  <a:srgbClr val="E7F0F3"/>
+                </a:solidFill>
+                <a:latin typeface="Arial"/>
+              </a:rPr>
+              <a:t>For a bubble the normal points inward, so the sphere</a:t>
+            </a:r>
+          </a:p>
+          <a:p>
+            <a:pPr algn="l">
+              <a:spcAft>
+                <a:spcPts val="0"/>
+              </a:spcAft>
+            </a:pPr>
+            <a:r>
+              <a:rPr sz="1250" b="0" i="0">
+                <a:solidFill>
+                  <a:srgbClr val="E7F0F3"/>
+                </a:solidFill>
+                <a:latin typeface="Arial"/>
+              </a:rPr>
+              <a:t>curvature is κ = −2/R.</a:t>
+            </a:r>
+          </a:p>
+        </p:txBody>
+      </p:sp>
+      <p:sp>
+        <p:nvSpPr>
+          <p:cNvPr id="16" name="C1-E28 text 14" descr="sci-ppt:o014"/>
+          <p:cNvSpPr txBox="1"/>
+          <p:nvPr/>
+        </p:nvSpPr>
+        <p:spPr>
+          <a:xfrm>
+            <a:off x="5577840" y="914400"/>
+            <a:ext cx="6217920" cy="262636"/>
+          </a:xfrm>
+          <a:prstGeom prst="rect">
+            <a:avLst/>
+          </a:prstGeom>
+          <a:noFill/>
+          <a:effectLst/>
+        </p:spPr>
+        <p:txBody>
+          <a:bodyPr wrap="none" lIns="18288" rIns="18288" tIns="18288" bIns="18288" anchor="t">
+            <a:spAutoFit/>
+          </a:bodyPr>
+          <a:lstStyle/>
+          <a:p>
+            <a:pPr algn="l">
+              <a:spcAft>
+                <a:spcPts val="0"/>
+              </a:spcAft>
+            </a:pPr>
+            <a:r>
+              <a:rPr sz="1400" b="1" i="0">
+                <a:solidFill>
+                  <a:srgbClr val="8EDBD4"/>
+                </a:solidFill>
+                <a:latin typeface="Arial"/>
+              </a:rPr>
+              <a:t>Three conditions on the interface Γ</a:t>
+            </a:r>
+          </a:p>
+        </p:txBody>
+      </p:sp>
+      <p:sp>
+        <p:nvSpPr>
+          <p:cNvPr id="17" name="C1-E28 round_rect 15" descr="sci-ppt:o015"/>
+          <p:cNvSpPr/>
+          <p:nvPr/>
+        </p:nvSpPr>
+        <p:spPr>
+          <a:xfrm>
+            <a:off x="5577840" y="1417320"/>
+            <a:ext cx="6263640" cy="1325880"/>
+          </a:xfrm>
+          <a:prstGeom prst="roundRect">
+            <a:avLst/>
+          </a:prstGeom>
+          <a:solidFill>
+            <a:srgbClr val="213E4B"/>
+          </a:solidFill>
+          <a:ln w="20320">
             <a:solidFill>
               <a:srgbClr val="B4C7D2"/>
             </a:solidFill>
@@ -3168,22 +3626,142 @@
       </p:sp>
       <p:sp>
         <p:nvSpPr>
-          <p:cNvPr id="4" name="ellipse3" descr="sci-ppt:C1-E28-003"/>
+          <p:cNvPr id="18" name="C1-E28 text 16" descr="sci-ppt:o016"/>
+          <p:cNvSpPr txBox="1"/>
+          <p:nvPr/>
+        </p:nvSpPr>
+        <p:spPr>
+          <a:xfrm>
+            <a:off x="5715000" y="1472184"/>
+            <a:ext cx="5943600" cy="247142"/>
+          </a:xfrm>
+          <a:prstGeom prst="rect">
+            <a:avLst/>
+          </a:prstGeom>
+          <a:noFill/>
+          <a:effectLst/>
+        </p:spPr>
+        <p:txBody>
+          <a:bodyPr wrap="none" lIns="18288" rIns="18288" tIns="18288" bIns="18288" anchor="t">
+            <a:spAutoFit/>
+          </a:bodyPr>
+          <a:lstStyle/>
+          <a:p>
+            <a:pPr algn="l">
+              <a:spcAft>
+                <a:spcPts val="0"/>
+              </a:spcAft>
+            </a:pPr>
+            <a:r>
+              <a:rPr sz="1300" b="1" i="0">
+                <a:solidFill>
+                  <a:srgbClr val="F2B880"/>
+                </a:solidFill>
+                <a:latin typeface="Arial"/>
+              </a:rPr>
+              <a:t>Kinematic</a:t>
+            </a:r>
+          </a:p>
+        </p:txBody>
+      </p:sp>
+      <p:sp>
+        <p:nvSpPr>
+          <p:cNvPr id="19" name="C1-E28 text 17" descr="sci-ppt:o017"/>
+          <p:cNvSpPr txBox="1"/>
+          <p:nvPr/>
+        </p:nvSpPr>
+        <p:spPr>
+          <a:xfrm>
+            <a:off x="5715000" y="1828800"/>
+            <a:ext cx="5943600" cy="262636"/>
+          </a:xfrm>
+          <a:prstGeom prst="rect">
+            <a:avLst/>
+          </a:prstGeom>
+          <a:noFill/>
+          <a:effectLst/>
+        </p:spPr>
+        <p:txBody>
+          <a:bodyPr wrap="none" lIns="18288" rIns="18288" tIns="18288" bIns="18288" anchor="t">
+            <a:spAutoFit/>
+          </a:bodyPr>
+          <a:lstStyle/>
+          <a:p>
+            <a:pPr algn="l">
+              <a:spcAft>
+                <a:spcPts val="0"/>
+              </a:spcAft>
+            </a:pPr>
+            <a:r>
+              <a:rPr sz="1400" b="1" i="0">
+                <a:solidFill>
+                  <a:srgbClr val="E7F0F3"/>
+                </a:solidFill>
+                <a:latin typeface="Arial"/>
+              </a:rPr>
+              <a:t>Vₙ = u · n</a:t>
+            </a:r>
+          </a:p>
+        </p:txBody>
+      </p:sp>
+      <p:sp>
+        <p:nvSpPr>
+          <p:cNvPr id="20" name="C1-E28 text 18" descr="sci-ppt:o018"/>
+          <p:cNvSpPr txBox="1"/>
+          <p:nvPr/>
+        </p:nvSpPr>
+        <p:spPr>
+          <a:xfrm>
+            <a:off x="5715000" y="2286000"/>
+            <a:ext cx="5943600" cy="231648"/>
+          </a:xfrm>
+          <a:prstGeom prst="rect">
+            <a:avLst/>
+          </a:prstGeom>
+          <a:noFill/>
+          <a:effectLst/>
+        </p:spPr>
+        <p:txBody>
+          <a:bodyPr wrap="none" lIns="18288" rIns="18288" tIns="18288" bIns="18288" anchor="t">
+            <a:spAutoFit/>
+          </a:bodyPr>
+          <a:lstStyle/>
+          <a:p>
+            <a:pPr algn="l">
+              <a:spcAft>
+                <a:spcPts val="0"/>
+              </a:spcAft>
+            </a:pPr>
+            <a:r>
+              <a:rPr sz="1200" b="0" i="0">
+                <a:solidFill>
+                  <a:srgbClr val="B4C7D2"/>
+                </a:solidFill>
+                <a:latin typeface="Arial"/>
+              </a:rPr>
+              <a:t>the surface moves with the liquid normal to itself</a:t>
+            </a:r>
+          </a:p>
+        </p:txBody>
+      </p:sp>
+      <p:sp>
+        <p:nvSpPr>
+          <p:cNvPr id="21" name="C1-E28 round_rect 19" descr="sci-ppt:o019"/>
           <p:cNvSpPr/>
           <p:nvPr/>
         </p:nvSpPr>
         <p:spPr>
           <a:xfrm>
-            <a:off x="2682240" y="1950720"/>
-            <a:ext cx="1584960" cy="1584960"/>
-          </a:xfrm>
-          <a:prstGeom prst="ellipse">
+            <a:off x="5577840" y="2880360"/>
+            <a:ext cx="6263640" cy="1325880"/>
+          </a:xfrm>
+          <a:prstGeom prst="roundRect">
             <a:avLst/>
           </a:prstGeom>
           <a:solidFill>
             <a:srgbClr val="213E4B"/>
           </a:solidFill>
-          <a:ln w="21590">
+          <a:ln w="20320">
             <a:solidFill>
               <a:srgbClr val="B4C7D2"/>
             </a:solidFill>
@@ -3198,40 +3776,16 @@
           </a:p>
         </p:txBody>
       </p:sp>
-      <p:cxnSp>
-        <p:nvCxnSpPr>
-          <p:cNvPr id="5" name="arrow4" descr="sci-ppt:C1-E28-004"/>
-          <p:cNvCxnSpPr/>
-          <p:nvPr/>
-        </p:nvCxnSpPr>
-        <p:spPr>
-          <a:xfrm>
-            <a:off x="4267200" y="2743200"/>
-            <a:ext cx="4023360" cy="0"/>
-          </a:xfrm>
-          <a:prstGeom prst="line">
-            <a:avLst/>
-          </a:prstGeom>
-          <a:ln w="25400">
-            <a:solidFill>
-              <a:srgbClr val="8EDBD4"/>
-            </a:solidFill>
-            <a:headEnd type="none" w="med" len="med"/>
-            <a:tailEnd type="triangle" w="med" len="med"/>
-          </a:ln>
-          <a:effectLst/>
-        </p:spPr>
-      </p:cxnSp>
-      <p:sp>
-        <p:nvSpPr>
-          <p:cNvPr id="6" name="text5" descr="sci-ppt:C1-E28-005"/>
+      <p:sp>
+        <p:nvSpPr>
+          <p:cNvPr id="22" name="C1-E28 text 20" descr="sci-ppt:o020"/>
           <p:cNvSpPr txBox="1"/>
           <p:nvPr/>
         </p:nvSpPr>
         <p:spPr>
           <a:xfrm>
-            <a:off x="6461760" y="1645920"/>
-            <a:ext cx="5364480" cy="396849"/>
+            <a:off x="5715000" y="2935224"/>
+            <a:ext cx="5943600" cy="247142"/>
           </a:xfrm>
           <a:prstGeom prst="rect">
             <a:avLst/>
@@ -3240,7 +3794,7 @@
           <a:effectLst/>
         </p:spPr>
         <p:txBody>
-          <a:bodyPr wrap="none" lIns="27432" rIns="27432" tIns="18288" bIns="18288" anchor="ctr">
+          <a:bodyPr wrap="none" lIns="18288" rIns="18288" tIns="18288" bIns="18288" anchor="t">
             <a:spAutoFit/>
           </a:bodyPr>
           <a:lstStyle/>
@@ -3251,27 +3805,67 @@
               </a:spcAft>
             </a:pPr>
             <a:r>
-              <a:rPr sz="2016" b="0" i="0">
+              <a:rPr sz="1300" b="1" i="0">
+                <a:solidFill>
+                  <a:srgbClr val="F2B880"/>
+                </a:solidFill>
+                <a:latin typeface="Arial"/>
+              </a:rPr>
+              <a:t>Normal stress</a:t>
+            </a:r>
+          </a:p>
+        </p:txBody>
+      </p:sp>
+      <p:sp>
+        <p:nvSpPr>
+          <p:cNvPr id="23" name="C1-E28 text 21" descr="sci-ppt:o021"/>
+          <p:cNvSpPr txBox="1"/>
+          <p:nvPr/>
+        </p:nvSpPr>
+        <p:spPr>
+          <a:xfrm>
+            <a:off x="5715000" y="3291840"/>
+            <a:ext cx="5943600" cy="262636"/>
+          </a:xfrm>
+          <a:prstGeom prst="rect">
+            <a:avLst/>
+          </a:prstGeom>
+          <a:noFill/>
+          <a:effectLst/>
+        </p:spPr>
+        <p:txBody>
+          <a:bodyPr wrap="none" lIns="18288" rIns="18288" tIns="18288" bIns="18288" anchor="t">
+            <a:spAutoFit/>
+          </a:bodyPr>
+          <a:lstStyle/>
+          <a:p>
+            <a:pPr algn="l">
+              <a:spcAft>
+                <a:spcPts val="0"/>
+              </a:spcAft>
+            </a:pPr>
+            <a:r>
+              <a:rPr sz="1400" b="1" i="0">
                 <a:solidFill>
                   <a:srgbClr val="E7F0F3"/>
                 </a:solidFill>
                 <a:latin typeface="Arial"/>
               </a:rPr>
-              <a:t>Liquid u(x,t), p(x,t)</a:t>
-            </a:r>
-          </a:p>
-        </p:txBody>
-      </p:sp>
-      <p:sp>
-        <p:nvSpPr>
-          <p:cNvPr id="7" name="text6" descr="sci-ppt:C1-E28-006"/>
+              <a:t>pₗ = p_b + σκ + 2μ n·D·n</a:t>
+            </a:r>
+          </a:p>
+        </p:txBody>
+      </p:sp>
+      <p:sp>
+        <p:nvSpPr>
+          <p:cNvPr id="24" name="C1-E28 text 22" descr="sci-ppt:o022"/>
           <p:cNvSpPr txBox="1"/>
           <p:nvPr/>
         </p:nvSpPr>
         <p:spPr>
           <a:xfrm>
-            <a:off x="7680960" y="3413760"/>
-            <a:ext cx="1950720" cy="359054"/>
+            <a:off x="5715000" y="3749040"/>
+            <a:ext cx="5943600" cy="231648"/>
           </a:xfrm>
           <a:prstGeom prst="rect">
             <a:avLst/>
@@ -3280,7 +3874,7 @@
           <a:effectLst/>
         </p:spPr>
         <p:txBody>
-          <a:bodyPr wrap="none" lIns="27432" rIns="27432" tIns="18288" bIns="18288" anchor="ctr">
+          <a:bodyPr wrap="none" lIns="18288" rIns="18288" tIns="18288" bIns="18288" anchor="t">
             <a:spAutoFit/>
           </a:bodyPr>
           <a:lstStyle/>
@@ -3291,51 +3885,139 @@
               </a:spcAft>
             </a:pPr>
             <a:r>
-              <a:rPr sz="1823" b="0" i="0">
+              <a:rPr sz="1200" b="0" i="0">
+                <a:solidFill>
+                  <a:srgbClr val="B4C7D2"/>
+                </a:solidFill>
+                <a:latin typeface="Arial"/>
+              </a:rPr>
+              <a:t>σκ = −2σ/R for a sphere</a:t>
+            </a:r>
+          </a:p>
+        </p:txBody>
+      </p:sp>
+      <p:sp>
+        <p:nvSpPr>
+          <p:cNvPr id="25" name="C1-E28 round_rect 23" descr="sci-ppt:o023"/>
+          <p:cNvSpPr/>
+          <p:nvPr/>
+        </p:nvSpPr>
+        <p:spPr>
+          <a:xfrm>
+            <a:off x="5577840" y="4343400"/>
+            <a:ext cx="6263640" cy="1325880"/>
+          </a:xfrm>
+          <a:prstGeom prst="roundRect">
+            <a:avLst/>
+          </a:prstGeom>
+          <a:solidFill>
+            <a:srgbClr val="213E4B"/>
+          </a:solidFill>
+          <a:ln w="20320">
+            <a:solidFill>
+              <a:srgbClr val="B4C7D2"/>
+            </a:solidFill>
+          </a:ln>
+          <a:effectLst/>
+        </p:spPr>
+        <p:txBody>
+          <a:bodyPr rtlCol="0" anchor="ctr"/>
+          <a:lstStyle/>
+          <a:p>
+            <a:pPr algn="ctr"/>
+          </a:p>
+        </p:txBody>
+      </p:sp>
+      <p:sp>
+        <p:nvSpPr>
+          <p:cNvPr id="26" name="C1-E28 text 24" descr="sci-ppt:o024"/>
+          <p:cNvSpPr txBox="1"/>
+          <p:nvPr/>
+        </p:nvSpPr>
+        <p:spPr>
+          <a:xfrm>
+            <a:off x="5715000" y="4398264"/>
+            <a:ext cx="5943600" cy="247142"/>
+          </a:xfrm>
+          <a:prstGeom prst="rect">
+            <a:avLst/>
+          </a:prstGeom>
+          <a:noFill/>
+          <a:effectLst/>
+        </p:spPr>
+        <p:txBody>
+          <a:bodyPr wrap="none" lIns="18288" rIns="18288" tIns="18288" bIns="18288" anchor="t">
+            <a:spAutoFit/>
+          </a:bodyPr>
+          <a:lstStyle/>
+          <a:p>
+            <a:pPr algn="l">
+              <a:spcAft>
+                <a:spcPts val="0"/>
+              </a:spcAft>
+            </a:pPr>
+            <a:r>
+              <a:rPr sz="1300" b="1" i="0">
+                <a:solidFill>
+                  <a:srgbClr val="F2B880"/>
+                </a:solidFill>
+                <a:latin typeface="Arial"/>
+              </a:rPr>
+              <a:t>Tangential stress</a:t>
+            </a:r>
+          </a:p>
+        </p:txBody>
+      </p:sp>
+      <p:sp>
+        <p:nvSpPr>
+          <p:cNvPr id="27" name="C1-E28 text 25" descr="sci-ppt:o025"/>
+          <p:cNvSpPr txBox="1"/>
+          <p:nvPr/>
+        </p:nvSpPr>
+        <p:spPr>
+          <a:xfrm>
+            <a:off x="5715000" y="4754880"/>
+            <a:ext cx="5943600" cy="262636"/>
+          </a:xfrm>
+          <a:prstGeom prst="rect">
+            <a:avLst/>
+          </a:prstGeom>
+          <a:noFill/>
+          <a:effectLst/>
+        </p:spPr>
+        <p:txBody>
+          <a:bodyPr wrap="none" lIns="18288" rIns="18288" tIns="18288" bIns="18288" anchor="t">
+            <a:spAutoFit/>
+          </a:bodyPr>
+          <a:lstStyle/>
+          <a:p>
+            <a:pPr algn="l">
+              <a:spcAft>
+                <a:spcPts val="0"/>
+              </a:spcAft>
+            </a:pPr>
+            <a:r>
+              <a:rPr sz="1400" b="1" i="0">
                 <a:solidFill>
                   <a:srgbClr val="E7F0F3"/>
                 </a:solidFill>
                 <a:latin typeface="Arial"/>
               </a:rPr>
-              <a:t>Outlet</a:t>
-            </a:r>
-          </a:p>
-        </p:txBody>
-      </p:sp>
-      <p:cxnSp>
-        <p:nvCxnSpPr>
-          <p:cNvPr id="8" name="arrow7" descr="sci-ppt:C1-E28-007"/>
-          <p:cNvCxnSpPr/>
-          <p:nvPr/>
-        </p:nvCxnSpPr>
-        <p:spPr>
-          <a:xfrm flipH="1">
-            <a:off x="3718560" y="2743200"/>
-            <a:ext cx="548640" cy="0"/>
-          </a:xfrm>
-          <a:prstGeom prst="line">
-            <a:avLst/>
-          </a:prstGeom>
-          <a:ln w="25400">
-            <a:solidFill>
-              <a:srgbClr val="F6BC77"/>
-            </a:solidFill>
-            <a:headEnd type="none" w="med" len="med"/>
-            <a:tailEnd type="triangle" w="med" len="med"/>
-          </a:ln>
-          <a:effectLst/>
-        </p:spPr>
-      </p:cxnSp>
-      <p:sp>
-        <p:nvSpPr>
-          <p:cNvPr id="9" name="text8" descr="sci-ppt:C1-E28-008"/>
+              <a:t>2μ s·D·n = 0</a:t>
+            </a:r>
+          </a:p>
+        </p:txBody>
+      </p:sp>
+      <p:sp>
+        <p:nvSpPr>
+          <p:cNvPr id="28" name="C1-E28 text 26" descr="sci-ppt:o026"/>
           <p:cNvSpPr txBox="1"/>
           <p:nvPr/>
         </p:nvSpPr>
         <p:spPr>
           <a:xfrm>
-            <a:off x="4023360" y="3048000"/>
-            <a:ext cx="3901440" cy="340156"/>
+            <a:off x="5715000" y="5212080"/>
+            <a:ext cx="5943600" cy="231648"/>
           </a:xfrm>
           <a:prstGeom prst="rect">
             <a:avLst/>
@@ -3344,7 +4026,7 @@
           <a:effectLst/>
         </p:spPr>
         <p:txBody>
-          <a:bodyPr wrap="none" lIns="27432" rIns="27432" tIns="18288" bIns="18288" anchor="ctr">
+          <a:bodyPr wrap="none" lIns="18288" rIns="18288" tIns="18288" bIns="18288" anchor="t">
             <a:spAutoFit/>
           </a:bodyPr>
           <a:lstStyle/>
@@ -3355,51 +4037,27 @@
               </a:spcAft>
             </a:pPr>
             <a:r>
-              <a:rPr sz="1728" b="0" i="0">
+              <a:rPr sz="1200" b="0" i="0">
                 <a:solidFill>
-                  <a:srgbClr val="F6BC77"/>
+                  <a:srgbClr val="B4C7D2"/>
                 </a:solidFill>
                 <a:latin typeface="Arial"/>
               </a:rPr>
-              <a:t>n: liquid → gas</a:t>
-            </a:r>
-          </a:p>
-        </p:txBody>
-      </p:sp>
-      <p:cxnSp>
-        <p:nvCxnSpPr>
-          <p:cNvPr id="10" name="arrow9" descr="sci-ppt:C1-E28-009"/>
-          <p:cNvCxnSpPr/>
-          <p:nvPr/>
-        </p:nvCxnSpPr>
-        <p:spPr>
-          <a:xfrm flipV="1">
-            <a:off x="4267200" y="2072640"/>
-            <a:ext cx="0" cy="670560"/>
-          </a:xfrm>
-          <a:prstGeom prst="line">
-            <a:avLst/>
-          </a:prstGeom>
-          <a:ln w="25400">
-            <a:solidFill>
-              <a:srgbClr val="8EDBD4"/>
-            </a:solidFill>
-            <a:headEnd type="none" w="med" len="med"/>
-            <a:tailEnd type="triangle" w="med" len="med"/>
-          </a:ln>
-          <a:effectLst/>
-        </p:spPr>
-      </p:cxnSp>
-      <p:sp>
-        <p:nvSpPr>
-          <p:cNvPr id="11" name="text10" descr="sci-ppt:C1-E28-010"/>
+              <a:t>gas cannot support shear</a:t>
+            </a:r>
+          </a:p>
+        </p:txBody>
+      </p:sp>
+      <p:sp>
+        <p:nvSpPr>
+          <p:cNvPr id="29" name="C1-E28 text 27" descr="sci-ppt:o027"/>
           <p:cNvSpPr txBox="1"/>
           <p:nvPr/>
         </p:nvSpPr>
         <p:spPr>
           <a:xfrm>
-            <a:off x="4389120" y="2133600"/>
-            <a:ext cx="2438400" cy="340156"/>
+            <a:off x="5577840" y="5806440"/>
+            <a:ext cx="6217920" cy="433070"/>
           </a:xfrm>
           <a:prstGeom prst="rect">
             <a:avLst/>
@@ -3408,7 +4066,7 @@
           <a:effectLst/>
         </p:spPr>
         <p:txBody>
-          <a:bodyPr wrap="none" lIns="27432" rIns="27432" tIns="18288" bIns="18288" anchor="ctr">
+          <a:bodyPr wrap="none" lIns="18288" rIns="18288" tIns="18288" bIns="18288" anchor="t">
             <a:spAutoFit/>
           </a:bodyPr>
           <a:lstStyle/>
@@ -3419,27 +4077,43 @@
               </a:spcAft>
             </a:pPr>
             <a:r>
-              <a:rPr sz="1728" b="0" i="0">
+              <a:rPr sz="1250" b="0" i="0">
                 <a:solidFill>
                   <a:srgbClr val="E7F0F3"/>
                 </a:solidFill>
                 <a:latin typeface="Arial"/>
               </a:rPr>
-              <a:t>s: tangent</a:t>
-            </a:r>
-          </a:p>
-        </p:txBody>
-      </p:sp>
-      <p:sp>
-        <p:nvSpPr>
-          <p:cNvPr id="12" name="text11" descr="sci-ppt:C1-E28-011"/>
+              <a:t>One sign convention for n, κ and D is required, or the terms cancel</a:t>
+            </a:r>
+          </a:p>
+          <a:p>
+            <a:pPr algn="l">
+              <a:spcAft>
+                <a:spcPts val="0"/>
+              </a:spcAft>
+            </a:pPr>
+            <a:r>
+              <a:rPr sz="1250" b="0" i="0">
+                <a:solidFill>
+                  <a:srgbClr val="E7F0F3"/>
+                </a:solidFill>
+                <a:latin typeface="Arial"/>
+              </a:rPr>
+              <a:t>wrongly.</a:t>
+            </a:r>
+          </a:p>
+        </p:txBody>
+      </p:sp>
+      <p:sp>
+        <p:nvSpPr>
+          <p:cNvPr id="30" name="C1-E28 text 28" descr="sci-ppt:o028"/>
           <p:cNvSpPr txBox="1"/>
           <p:nvPr/>
         </p:nvSpPr>
         <p:spPr>
           <a:xfrm>
-            <a:off x="1584960" y="4206240"/>
-            <a:ext cx="9753600" cy="359054"/>
+            <a:off x="320040" y="6510528"/>
+            <a:ext cx="11521440" cy="200660"/>
           </a:xfrm>
           <a:prstGeom prst="rect">
             <a:avLst/>
@@ -3448,7 +4122,7 @@
           <a:effectLst/>
         </p:spPr>
         <p:txBody>
-          <a:bodyPr wrap="none" lIns="27432" rIns="27432" tIns="18288" bIns="18288" anchor="ctr">
+          <a:bodyPr wrap="none" lIns="18288" rIns="18288" tIns="18288" bIns="18288" anchor="t">
             <a:spAutoFit/>
           </a:bodyPr>
           <a:lstStyle/>
@@ -3459,533 +4133,13 @@
               </a:spcAft>
             </a:pPr>
             <a:r>
-              <a:rPr sz="1823" b="0" i="0">
-                <a:solidFill>
-                  <a:srgbClr val="E7F0F3"/>
-                </a:solidFill>
-                <a:latin typeface="Arial"/>
-              </a:rPr>
-              <a:t>Moving interface Gamma; spatial field required.</a:t>
-            </a:r>
-          </a:p>
-        </p:txBody>
-      </p:sp>
-      <p:sp>
-        <p:nvSpPr>
-          <p:cNvPr id="13" name="text12" descr="sci-ppt:C1-E28-012"/>
-          <p:cNvSpPr txBox="1"/>
-          <p:nvPr/>
-        </p:nvSpPr>
-        <p:spPr>
-          <a:xfrm>
-            <a:off x="365760" y="4974336"/>
-            <a:ext cx="5547360" cy="321259"/>
-          </a:xfrm>
-          <a:prstGeom prst="rect">
-            <a:avLst/>
-          </a:prstGeom>
-          <a:noFill/>
-          <a:effectLst/>
-        </p:spPr>
-        <p:txBody>
-          <a:bodyPr wrap="none" lIns="27432" rIns="27432" tIns="18288" bIns="18288" anchor="ctr">
-            <a:spAutoFit/>
-          </a:bodyPr>
-          <a:lstStyle/>
-          <a:p>
-            <a:pPr algn="l">
-              <a:spcAft>
-                <a:spcPts val="0"/>
-              </a:spcAft>
-            </a:pPr>
-            <a:r>
-              <a:rPr sz="1632" b="0" i="0">
-                <a:solidFill>
-                  <a:srgbClr val="E7F0F3"/>
-                </a:solidFill>
-                <a:latin typeface="Arial"/>
-              </a:rPr>
-              <a:t>Γ: liquid–gas interface</a:t>
-            </a:r>
-          </a:p>
-        </p:txBody>
-      </p:sp>
-      <p:sp>
-        <p:nvSpPr>
-          <p:cNvPr id="14" name="text13" descr="sci-ppt:C1-E28-013"/>
-          <p:cNvSpPr txBox="1"/>
-          <p:nvPr/>
-        </p:nvSpPr>
-        <p:spPr>
-          <a:xfrm>
-            <a:off x="365760" y="5266944"/>
-            <a:ext cx="5547360" cy="321259"/>
-          </a:xfrm>
-          <a:prstGeom prst="rect">
-            <a:avLst/>
-          </a:prstGeom>
-          <a:noFill/>
-          <a:effectLst/>
-        </p:spPr>
-        <p:txBody>
-          <a:bodyPr wrap="none" lIns="27432" rIns="27432" tIns="18288" bIns="18288" anchor="ctr">
-            <a:spAutoFit/>
-          </a:bodyPr>
-          <a:lstStyle/>
-          <a:p>
-            <a:pPr algn="l">
-              <a:spcAft>
-                <a:spcPts val="0"/>
-              </a:spcAft>
-            </a:pPr>
-            <a:r>
-              <a:rPr sz="1632" b="0" i="0">
-                <a:solidFill>
-                  <a:srgbClr val="E7F0F3"/>
-                </a:solidFill>
-                <a:latin typeface="Arial"/>
-              </a:rPr>
-              <a:t>s: tangent</a:t>
-            </a:r>
-          </a:p>
-        </p:txBody>
-      </p:sp>
-      <p:sp>
-        <p:nvSpPr>
-          <p:cNvPr id="15" name="text14" descr="sci-ppt:C1-E28-014"/>
-          <p:cNvSpPr txBox="1"/>
-          <p:nvPr/>
-        </p:nvSpPr>
-        <p:spPr>
-          <a:xfrm>
-            <a:off x="365760" y="5559552"/>
-            <a:ext cx="5547360" cy="321259"/>
-          </a:xfrm>
-          <a:prstGeom prst="rect">
-            <a:avLst/>
-          </a:prstGeom>
-          <a:noFill/>
-          <a:effectLst/>
-        </p:spPr>
-        <p:txBody>
-          <a:bodyPr wrap="none" lIns="27432" rIns="27432" tIns="18288" bIns="18288" anchor="ctr">
-            <a:spAutoFit/>
-          </a:bodyPr>
-          <a:lstStyle/>
-          <a:p>
-            <a:pPr algn="l">
-              <a:spcAft>
-                <a:spcPts val="0"/>
-              </a:spcAft>
-            </a:pPr>
-            <a:r>
-              <a:rPr sz="1632" b="0" i="0">
-                <a:solidFill>
-                  <a:srgbClr val="E7F0F3"/>
-                </a:solidFill>
-                <a:latin typeface="Arial"/>
-              </a:rPr>
-              <a:t>u</a:t>
-            </a:r>
-          </a:p>
-        </p:txBody>
-      </p:sp>
-      <p:sp>
-        <p:nvSpPr>
-          <p:cNvPr id="16" name="text15" descr="sci-ppt:C1-E28-015"/>
-          <p:cNvSpPr txBox="1"/>
-          <p:nvPr/>
-        </p:nvSpPr>
-        <p:spPr>
-          <a:xfrm>
-            <a:off x="365760" y="5852160"/>
-            <a:ext cx="5547360" cy="321259"/>
-          </a:xfrm>
-          <a:prstGeom prst="rect">
-            <a:avLst/>
-          </a:prstGeom>
-          <a:noFill/>
-          <a:effectLst/>
-        </p:spPr>
-        <p:txBody>
-          <a:bodyPr wrap="none" lIns="27432" rIns="27432" tIns="18288" bIns="18288" anchor="ctr">
-            <a:spAutoFit/>
-          </a:bodyPr>
-          <a:lstStyle/>
-          <a:p>
-            <a:pPr algn="l">
-              <a:spcAft>
-                <a:spcPts val="0"/>
-              </a:spcAft>
-            </a:pPr>
-            <a:r>
-              <a:rPr sz="1632" b="0" i="0">
-                <a:solidFill>
-                  <a:srgbClr val="E7F0F3"/>
-                </a:solidFill>
-                <a:latin typeface="Arial"/>
-              </a:rPr>
-              <a:t>pl</a:t>
-            </a:r>
-          </a:p>
-        </p:txBody>
-      </p:sp>
-      <p:sp>
-        <p:nvSpPr>
-          <p:cNvPr id="17" name="text16" descr="sci-ppt:C1-E28-016"/>
-          <p:cNvSpPr txBox="1"/>
-          <p:nvPr/>
-        </p:nvSpPr>
-        <p:spPr>
-          <a:xfrm>
-            <a:off x="365760" y="6144768"/>
-            <a:ext cx="5547360" cy="321259"/>
-          </a:xfrm>
-          <a:prstGeom prst="rect">
-            <a:avLst/>
-          </a:prstGeom>
-          <a:noFill/>
-          <a:effectLst/>
-        </p:spPr>
-        <p:txBody>
-          <a:bodyPr wrap="none" lIns="27432" rIns="27432" tIns="18288" bIns="18288" anchor="ctr">
-            <a:spAutoFit/>
-          </a:bodyPr>
-          <a:lstStyle/>
-          <a:p>
-            <a:pPr algn="l">
-              <a:spcAft>
-                <a:spcPts val="0"/>
-              </a:spcAft>
-            </a:pPr>
-            <a:r>
-              <a:rPr sz="1632" b="0" i="0">
-                <a:solidFill>
-                  <a:srgbClr val="E7F0F3"/>
-                </a:solidFill>
-                <a:latin typeface="Arial"/>
-              </a:rPr>
-              <a:t>σκ</a:t>
-            </a:r>
-          </a:p>
-        </p:txBody>
-      </p:sp>
-      <p:sp>
-        <p:nvSpPr>
-          <p:cNvPr id="18" name="text17" descr="sci-ppt:C1-E28-017"/>
-          <p:cNvSpPr txBox="1"/>
-          <p:nvPr/>
-        </p:nvSpPr>
-        <p:spPr>
-          <a:xfrm>
-            <a:off x="365760" y="6437376"/>
-            <a:ext cx="5547360" cy="321259"/>
-          </a:xfrm>
-          <a:prstGeom prst="rect">
-            <a:avLst/>
-          </a:prstGeom>
-          <a:noFill/>
-          <a:effectLst/>
-        </p:spPr>
-        <p:txBody>
-          <a:bodyPr wrap="none" lIns="27432" rIns="27432" tIns="18288" bIns="18288" anchor="ctr">
-            <a:spAutoFit/>
-          </a:bodyPr>
-          <a:lstStyle/>
-          <a:p>
-            <a:pPr algn="l">
-              <a:spcAft>
-                <a:spcPts val="0"/>
-              </a:spcAft>
-            </a:pPr>
-            <a:r>
-              <a:rPr sz="1632" b="0" i="0">
-                <a:solidFill>
-                  <a:srgbClr val="E7F0F3"/>
-                </a:solidFill>
-                <a:latin typeface="Arial"/>
-              </a:rPr>
-              <a:t>κsphere = −2/R</a:t>
-            </a:r>
-          </a:p>
-        </p:txBody>
-      </p:sp>
-      <p:sp>
-        <p:nvSpPr>
-          <p:cNvPr id="19" name="text18" descr="sci-ppt:C1-E28-018"/>
-          <p:cNvSpPr txBox="1"/>
-          <p:nvPr/>
-        </p:nvSpPr>
-        <p:spPr>
-          <a:xfrm>
-            <a:off x="6156960" y="4974336"/>
-            <a:ext cx="5547360" cy="321259"/>
-          </a:xfrm>
-          <a:prstGeom prst="rect">
-            <a:avLst/>
-          </a:prstGeom>
-          <a:noFill/>
-          <a:effectLst/>
-        </p:spPr>
-        <p:txBody>
-          <a:bodyPr wrap="none" lIns="27432" rIns="27432" tIns="18288" bIns="18288" anchor="ctr">
-            <a:spAutoFit/>
-          </a:bodyPr>
-          <a:lstStyle/>
-          <a:p>
-            <a:pPr algn="l">
-              <a:spcAft>
-                <a:spcPts val="0"/>
-              </a:spcAft>
-            </a:pPr>
-            <a:r>
-              <a:rPr sz="1632" b="0" i="0">
-                <a:solidFill>
-                  <a:srgbClr val="E7F0F3"/>
-                </a:solidFill>
-                <a:latin typeface="Arial"/>
-              </a:rPr>
-              <a:t>n: liquid → gas</a:t>
-            </a:r>
-          </a:p>
-        </p:txBody>
-      </p:sp>
-      <p:sp>
-        <p:nvSpPr>
-          <p:cNvPr id="20" name="text19" descr="sci-ppt:C1-E28-019"/>
-          <p:cNvSpPr txBox="1"/>
-          <p:nvPr/>
-        </p:nvSpPr>
-        <p:spPr>
-          <a:xfrm>
-            <a:off x="6156960" y="5266944"/>
-            <a:ext cx="5547360" cy="321259"/>
-          </a:xfrm>
-          <a:prstGeom prst="rect">
-            <a:avLst/>
-          </a:prstGeom>
-          <a:noFill/>
-          <a:effectLst/>
-        </p:spPr>
-        <p:txBody>
-          <a:bodyPr wrap="none" lIns="27432" rIns="27432" tIns="18288" bIns="18288" anchor="ctr">
-            <a:spAutoFit/>
-          </a:bodyPr>
-          <a:lstStyle/>
-          <a:p>
-            <a:pPr algn="l">
-              <a:spcAft>
-                <a:spcPts val="0"/>
-              </a:spcAft>
-            </a:pPr>
-            <a:r>
-              <a:rPr sz="1632" b="0" i="0">
-                <a:solidFill>
-                  <a:srgbClr val="E7F0F3"/>
-                </a:solidFill>
-                <a:latin typeface="Arial"/>
-              </a:rPr>
-              <a:t>Vn = u·n</a:t>
-            </a:r>
-          </a:p>
-        </p:txBody>
-      </p:sp>
-      <p:sp>
-        <p:nvSpPr>
-          <p:cNvPr id="21" name="text20" descr="sci-ppt:C1-E28-020"/>
-          <p:cNvSpPr txBox="1"/>
-          <p:nvPr/>
-        </p:nvSpPr>
-        <p:spPr>
-          <a:xfrm>
-            <a:off x="6156960" y="5559552"/>
-            <a:ext cx="5547360" cy="321259"/>
-          </a:xfrm>
-          <a:prstGeom prst="rect">
-            <a:avLst/>
-          </a:prstGeom>
-          <a:noFill/>
-          <a:effectLst/>
-        </p:spPr>
-        <p:txBody>
-          <a:bodyPr wrap="none" lIns="27432" rIns="27432" tIns="18288" bIns="18288" anchor="ctr">
-            <a:spAutoFit/>
-          </a:bodyPr>
-          <a:lstStyle/>
-          <a:p>
-            <a:pPr algn="l">
-              <a:spcAft>
-                <a:spcPts val="0"/>
-              </a:spcAft>
-            </a:pPr>
-            <a:r>
-              <a:rPr sz="1632" b="0" i="0">
-                <a:solidFill>
-                  <a:srgbClr val="E7F0F3"/>
-                </a:solidFill>
-                <a:latin typeface="Arial"/>
-              </a:rPr>
-              <a:t>D</a:t>
-            </a:r>
-          </a:p>
-        </p:txBody>
-      </p:sp>
-      <p:sp>
-        <p:nvSpPr>
-          <p:cNvPr id="22" name="text21" descr="sci-ppt:C1-E28-021"/>
-          <p:cNvSpPr txBox="1"/>
-          <p:nvPr/>
-        </p:nvSpPr>
-        <p:spPr>
-          <a:xfrm>
-            <a:off x="6156960" y="5852160"/>
-            <a:ext cx="5547360" cy="321259"/>
-          </a:xfrm>
-          <a:prstGeom prst="rect">
-            <a:avLst/>
-          </a:prstGeom>
-          <a:noFill/>
-          <a:effectLst/>
-        </p:spPr>
-        <p:txBody>
-          <a:bodyPr wrap="none" lIns="27432" rIns="27432" tIns="18288" bIns="18288" anchor="ctr">
-            <a:spAutoFit/>
-          </a:bodyPr>
-          <a:lstStyle/>
-          <a:p>
-            <a:pPr algn="l">
-              <a:spcAft>
-                <a:spcPts val="0"/>
-              </a:spcAft>
-            </a:pPr>
-            <a:r>
-              <a:rPr sz="1632" b="0" i="0">
-                <a:solidFill>
-                  <a:srgbClr val="E7F0F3"/>
-                </a:solidFill>
-                <a:latin typeface="Arial"/>
-              </a:rPr>
-              <a:t>pb</a:t>
-            </a:r>
-          </a:p>
-        </p:txBody>
-      </p:sp>
-      <p:sp>
-        <p:nvSpPr>
-          <p:cNvPr id="23" name="text22" descr="sci-ppt:C1-E28-022"/>
-          <p:cNvSpPr txBox="1"/>
-          <p:nvPr/>
-        </p:nvSpPr>
-        <p:spPr>
-          <a:xfrm>
-            <a:off x="6156960" y="6144768"/>
-            <a:ext cx="5547360" cy="321259"/>
-          </a:xfrm>
-          <a:prstGeom prst="rect">
-            <a:avLst/>
-          </a:prstGeom>
-          <a:noFill/>
-          <a:effectLst/>
-        </p:spPr>
-        <p:txBody>
-          <a:bodyPr wrap="none" lIns="27432" rIns="27432" tIns="18288" bIns="18288" anchor="ctr">
-            <a:spAutoFit/>
-          </a:bodyPr>
-          <a:lstStyle/>
-          <a:p>
-            <a:pPr algn="l">
-              <a:spcAft>
-                <a:spcPts val="0"/>
-              </a:spcAft>
-            </a:pPr>
-            <a:r>
-              <a:rPr sz="1632" b="0" i="0">
-                <a:solidFill>
-                  <a:srgbClr val="E7F0F3"/>
-                </a:solidFill>
-                <a:latin typeface="Arial"/>
-              </a:rPr>
-              <a:t>2μ n·D n</a:t>
-            </a:r>
-          </a:p>
-        </p:txBody>
-      </p:sp>
-      <p:sp>
-        <p:nvSpPr>
-          <p:cNvPr id="24" name="text23" descr="sci-ppt:C1-E28-023"/>
-          <p:cNvSpPr txBox="1"/>
-          <p:nvPr/>
-        </p:nvSpPr>
-        <p:spPr>
-          <a:xfrm>
-            <a:off x="365760" y="6925056"/>
-            <a:ext cx="11277600" cy="302361"/>
-          </a:xfrm>
-          <a:prstGeom prst="rect">
-            <a:avLst/>
-          </a:prstGeom>
-          <a:noFill/>
-          <a:effectLst/>
-        </p:spPr>
-        <p:txBody>
-          <a:bodyPr wrap="none" lIns="27432" rIns="27432" tIns="18288" bIns="18288" anchor="ctr">
-            <a:spAutoFit/>
-          </a:bodyPr>
-          <a:lstStyle/>
-          <a:p>
-            <a:pPr algn="l">
-              <a:spcAft>
-                <a:spcPts val="0"/>
-              </a:spcAft>
-            </a:pPr>
-            <a:r>
-              <a:rPr sz="1536" b="0" i="0">
+              <a:rPr sz="1000" b="0" i="0">
                 <a:solidFill>
                   <a:srgbClr val="B4C7D2"/>
                 </a:solidFill>
                 <a:latin typeface="Arial"/>
               </a:rPr>
-              <a:t>At a stationary no-slip solid wall use the wall velocity instead</a:t>
-            </a:r>
-          </a:p>
-        </p:txBody>
-      </p:sp>
-      <p:sp>
-        <p:nvSpPr>
-          <p:cNvPr id="25" name="text24" descr="sci-ppt:C1-E28-024"/>
-          <p:cNvSpPr txBox="1"/>
-          <p:nvPr/>
-        </p:nvSpPr>
-        <p:spPr>
-          <a:xfrm>
-            <a:off x="365760" y="7217664"/>
-            <a:ext cx="11277600" cy="302361"/>
-          </a:xfrm>
-          <a:prstGeom prst="rect">
-            <a:avLst/>
-          </a:prstGeom>
-          <a:noFill/>
-          <a:effectLst/>
-        </p:spPr>
-        <p:txBody>
-          <a:bodyPr wrap="none" lIns="27432" rIns="27432" tIns="18288" bIns="18288" anchor="ctr">
-            <a:spAutoFit/>
-          </a:bodyPr>
-          <a:lstStyle/>
-          <a:p>
-            <a:pPr algn="l">
-              <a:spcAft>
-                <a:spcPts val="0"/>
-              </a:spcAft>
-            </a:pPr>
-            <a:r>
-              <a:rPr sz="1536" b="0" i="0">
-                <a:solidFill>
-                  <a:srgbClr val="B4C7D2"/>
-                </a:solidFill>
-                <a:latin typeface="Arial"/>
-              </a:rPr>
-              <a:t>Phase transfer modifies the kinematic condition in Chapter 2</a:t>
+              <a:t>D = ½(∇u + ∇uᵀ) is the strain-rate tensor (Eq. C1-E28).</a:t>
             </a:r>
           </a:p>
         </p:txBody>

--- a/assets/figures-editable/c1-c2/c1-e28.pptx
+++ b/assets/figures-editable/c1-c2/c1-e28.pptx
@@ -3131,7 +3131,7 @@
                 </a:solidFill>
                 <a:latin typeface="Arial"/>
               </a:rPr>
-              <a:t>C1-E28 · Kinematic condition and clean-interface traction</a:t>
+              <a:t>C1-E28 · Inviscid pre-impact moving-interface closure</a:t>
             </a:r>
           </a:p>
         </p:txBody>
@@ -3145,7 +3145,7 @@
         <p:spPr>
           <a:xfrm>
             <a:off x="365760" y="914400"/>
-            <a:ext cx="4937760" cy="4937760"/>
+            <a:ext cx="5486400" cy="4937760"/>
           </a:xfrm>
           <a:prstGeom prst="roundRect">
             <a:avLst/>
@@ -3177,7 +3177,7 @@
         <p:spPr>
           <a:xfrm>
             <a:off x="475488" y="969264"/>
-            <a:ext cx="4718304" cy="254889"/>
+            <a:ext cx="5266944" cy="254889"/>
           </a:xfrm>
           <a:prstGeom prst="rect">
             <a:avLst/>
@@ -3203,61 +3203,278 @@
                 </a:solidFill>
                 <a:latin typeface="Arial"/>
               </a:rPr>
-              <a:t>Interface patch and conventions</a:t>
-            </a:r>
-          </a:p>
-        </p:txBody>
-      </p:sp>
-      <p:sp>
-        <p:nvSpPr>
-          <p:cNvPr id="5" name="C1-E28 ellipse 3" descr="sci-ppt:o003"/>
+              <a:t>A shape that is not a sphere</a:t>
+            </a:r>
+          </a:p>
+        </p:txBody>
+      </p:sp>
+      <p:sp>
+        <p:nvSpPr>
+          <p:cNvPr id="5" name="C1-E28 polygon 3" descr="sci-ppt:o003"/>
           <p:cNvSpPr/>
           <p:nvPr/>
         </p:nvSpPr>
         <p:spPr>
           <a:xfrm>
-            <a:off x="1188719" y="1965960"/>
-            <a:ext cx="3108960" cy="3108960"/>
-          </a:xfrm>
-          <a:prstGeom prst="ellipse">
-            <a:avLst/>
-          </a:prstGeom>
-          <a:solidFill>
-            <a:srgbClr val="1E4A5A"/>
-          </a:solidFill>
-          <a:ln w="12700">
-            <a:solidFill>
-              <a:srgbClr val="2B6678"/>
-            </a:solidFill>
-          </a:ln>
-          <a:effectLst/>
-        </p:spPr>
-        <p:txBody>
-          <a:bodyPr rtlCol="0" anchor="ctr"/>
-          <a:lstStyle/>
-          <a:p>
-            <a:pPr algn="ctr"/>
-          </a:p>
-        </p:txBody>
-      </p:sp>
-      <p:sp>
-        <p:nvSpPr>
-          <p:cNvPr id="6" name="C1-E28 ellipse 4" descr="sci-ppt:o004"/>
-          <p:cNvSpPr/>
-          <p:nvPr/>
-        </p:nvSpPr>
-        <p:spPr>
-          <a:xfrm>
-            <a:off x="1554480" y="2331720"/>
-            <a:ext cx="2377440" cy="2377440"/>
-          </a:xfrm>
-          <a:prstGeom prst="ellipse">
-            <a:avLst/>
-          </a:prstGeom>
+            <a:off x="1685048" y="2628162"/>
+            <a:ext cx="3152676" cy="1510235"/>
+          </a:xfrm>
+          <a:custGeom>
+            <a:avLst/>
+            <a:gdLst/>
+            <a:ahLst/>
+            <a:cxnLst/>
+            <a:rect l="l" t="t" r="r" b="b"/>
+            <a:pathLst>
+              <a:path w="3152676" h="1510235">
+                <a:moveTo>
+                  <a:pt x="3152676" y="755118"/>
+                </a:moveTo>
+                <a:lnTo>
+                  <a:pt x="3142764" y="653859"/>
+                </a:lnTo>
+                <a:lnTo>
+                  <a:pt x="3113333" y="554796"/>
+                </a:lnTo>
+                <a:lnTo>
+                  <a:pt x="3065286" y="460027"/>
+                </a:lnTo>
+                <a:lnTo>
+                  <a:pt x="3000076" y="371460"/>
+                </a:lnTo>
+                <a:lnTo>
+                  <a:pt x="2919636" y="290738"/>
+                </a:lnTo>
+                <a:lnTo>
+                  <a:pt x="2826287" y="219163"/>
+                </a:lnTo>
+                <a:lnTo>
+                  <a:pt x="2722620" y="157652"/>
+                </a:lnTo>
+                <a:lnTo>
+                  <a:pt x="2611377" y="106709"/>
+                </a:lnTo>
+                <a:lnTo>
+                  <a:pt x="2495317" y="66415"/>
+                </a:lnTo>
+                <a:lnTo>
+                  <a:pt x="2377091" y="36444"/>
+                </a:lnTo>
+                <a:lnTo>
+                  <a:pt x="2259126" y="16100"/>
+                </a:lnTo>
+                <a:lnTo>
+                  <a:pt x="2143517" y="4370"/>
+                </a:lnTo>
+                <a:lnTo>
+                  <a:pt x="2031947" y="0"/>
+                </a:lnTo>
+                <a:lnTo>
+                  <a:pt x="1925628" y="1567"/>
+                </a:lnTo>
+                <a:lnTo>
+                  <a:pt x="1825274" y="7579"/>
+                </a:lnTo>
+                <a:lnTo>
+                  <a:pt x="1731097" y="16558"/>
+                </a:lnTo>
+                <a:lnTo>
+                  <a:pt x="1642835" y="27128"/>
+                </a:lnTo>
+                <a:lnTo>
+                  <a:pt x="1559811" y="38100"/>
+                </a:lnTo>
+                <a:lnTo>
+                  <a:pt x="1481003" y="48531"/>
+                </a:lnTo>
+                <a:lnTo>
+                  <a:pt x="1405150" y="57780"/>
+                </a:lnTo>
+                <a:lnTo>
+                  <a:pt x="1330852" y="65538"/>
+                </a:lnTo>
+                <a:lnTo>
+                  <a:pt x="1256693" y="71837"/>
+                </a:lnTo>
+                <a:lnTo>
+                  <a:pt x="1181351" y="77041"/>
+                </a:lnTo>
+                <a:lnTo>
+                  <a:pt x="1103709" y="81818"/>
+                </a:lnTo>
+                <a:lnTo>
+                  <a:pt x="1022946" y="87087"/>
+                </a:lnTo>
+                <a:lnTo>
+                  <a:pt x="938617" y="93960"/>
+                </a:lnTo>
+                <a:lnTo>
+                  <a:pt x="850701" y="103658"/>
+                </a:lnTo>
+                <a:lnTo>
+                  <a:pt x="759630" y="117436"/>
+                </a:lnTo>
+                <a:lnTo>
+                  <a:pt x="666282" y="136495"/>
+                </a:lnTo>
+                <a:lnTo>
+                  <a:pt x="571959" y="161898"/>
+                </a:lnTo>
+                <a:lnTo>
+                  <a:pt x="478324" y="194498"/>
+                </a:lnTo>
+                <a:lnTo>
+                  <a:pt x="387331" y="234875"/>
+                </a:lnTo>
+                <a:lnTo>
+                  <a:pt x="301117" y="283286"/>
+                </a:lnTo>
+                <a:lnTo>
+                  <a:pt x="221907" y="339636"/>
+                </a:lnTo>
+                <a:lnTo>
+                  <a:pt x="151885" y="403475"/>
+                </a:lnTo>
+                <a:lnTo>
+                  <a:pt x="93089" y="474001"/>
+                </a:lnTo>
+                <a:lnTo>
+                  <a:pt x="47298" y="550094"/>
+                </a:lnTo>
+                <a:lnTo>
+                  <a:pt x="15937" y="630371"/>
+                </a:lnTo>
+                <a:lnTo>
+                  <a:pt x="0" y="713242"/>
+                </a:lnTo>
+                <a:lnTo>
+                  <a:pt x="0" y="796993"/>
+                </a:lnTo>
+                <a:lnTo>
+                  <a:pt x="15937" y="879864"/>
+                </a:lnTo>
+                <a:lnTo>
+                  <a:pt x="47298" y="960141"/>
+                </a:lnTo>
+                <a:lnTo>
+                  <a:pt x="93089" y="1036234"/>
+                </a:lnTo>
+                <a:lnTo>
+                  <a:pt x="151885" y="1106760"/>
+                </a:lnTo>
+                <a:lnTo>
+                  <a:pt x="221907" y="1170599"/>
+                </a:lnTo>
+                <a:lnTo>
+                  <a:pt x="301117" y="1226949"/>
+                </a:lnTo>
+                <a:lnTo>
+                  <a:pt x="387331" y="1275360"/>
+                </a:lnTo>
+                <a:lnTo>
+                  <a:pt x="478324" y="1315737"/>
+                </a:lnTo>
+                <a:lnTo>
+                  <a:pt x="571959" y="1348337"/>
+                </a:lnTo>
+                <a:lnTo>
+                  <a:pt x="666282" y="1373740"/>
+                </a:lnTo>
+                <a:lnTo>
+                  <a:pt x="759630" y="1392799"/>
+                </a:lnTo>
+                <a:lnTo>
+                  <a:pt x="850701" y="1406577"/>
+                </a:lnTo>
+                <a:lnTo>
+                  <a:pt x="938617" y="1416275"/>
+                </a:lnTo>
+                <a:lnTo>
+                  <a:pt x="1022946" y="1423148"/>
+                </a:lnTo>
+                <a:lnTo>
+                  <a:pt x="1103709" y="1428417"/>
+                </a:lnTo>
+                <a:lnTo>
+                  <a:pt x="1181351" y="1433194"/>
+                </a:lnTo>
+                <a:lnTo>
+                  <a:pt x="1256693" y="1438398"/>
+                </a:lnTo>
+                <a:lnTo>
+                  <a:pt x="1330852" y="1444697"/>
+                </a:lnTo>
+                <a:lnTo>
+                  <a:pt x="1405150" y="1452455"/>
+                </a:lnTo>
+                <a:lnTo>
+                  <a:pt x="1481003" y="1461704"/>
+                </a:lnTo>
+                <a:lnTo>
+                  <a:pt x="1559811" y="1472135"/>
+                </a:lnTo>
+                <a:lnTo>
+                  <a:pt x="1642835" y="1483107"/>
+                </a:lnTo>
+                <a:lnTo>
+                  <a:pt x="1731097" y="1493677"/>
+                </a:lnTo>
+                <a:lnTo>
+                  <a:pt x="1825274" y="1502656"/>
+                </a:lnTo>
+                <a:lnTo>
+                  <a:pt x="1925628" y="1508668"/>
+                </a:lnTo>
+                <a:lnTo>
+                  <a:pt x="2031947" y="1510235"/>
+                </a:lnTo>
+                <a:lnTo>
+                  <a:pt x="2143517" y="1505865"/>
+                </a:lnTo>
+                <a:lnTo>
+                  <a:pt x="2259126" y="1494135"/>
+                </a:lnTo>
+                <a:lnTo>
+                  <a:pt x="2377091" y="1473791"/>
+                </a:lnTo>
+                <a:lnTo>
+                  <a:pt x="2495317" y="1443820"/>
+                </a:lnTo>
+                <a:lnTo>
+                  <a:pt x="2611377" y="1403526"/>
+                </a:lnTo>
+                <a:lnTo>
+                  <a:pt x="2722620" y="1352583"/>
+                </a:lnTo>
+                <a:lnTo>
+                  <a:pt x="2826287" y="1291072"/>
+                </a:lnTo>
+                <a:lnTo>
+                  <a:pt x="2919636" y="1219497"/>
+                </a:lnTo>
+                <a:lnTo>
+                  <a:pt x="3000076" y="1138775"/>
+                </a:lnTo>
+                <a:lnTo>
+                  <a:pt x="3065286" y="1050208"/>
+                </a:lnTo>
+                <a:lnTo>
+                  <a:pt x="3113333" y="955439"/>
+                </a:lnTo>
+                <a:lnTo>
+                  <a:pt x="3142764" y="856376"/>
+                </a:lnTo>
+                <a:lnTo>
+                  <a:pt x="3152676" y="755118"/>
+                </a:lnTo>
+                <a:close/>
+              </a:path>
+            </a:pathLst>
+          </a:custGeom>
           <a:solidFill>
             <a:srgbClr val="0C1820"/>
           </a:solidFill>
-          <a:ln w="27940">
+          <a:ln w="30480">
             <a:solidFill>
               <a:srgbClr val="F2B880"/>
             </a:solidFill>
@@ -3272,23 +3489,667 @@
           </a:p>
         </p:txBody>
       </p:sp>
+      <p:sp>
+        <p:nvSpPr>
+          <p:cNvPr id="6" name="C1-E28 text 4" descr="sci-ppt:o004"/>
+          <p:cNvSpPr txBox="1"/>
+          <p:nvPr/>
+        </p:nvSpPr>
+        <p:spPr>
+          <a:xfrm>
+            <a:off x="2743200" y="3291840"/>
+            <a:ext cx="731520" cy="355599"/>
+          </a:xfrm>
+          <a:prstGeom prst="rect">
+            <a:avLst/>
+          </a:prstGeom>
+          <a:noFill/>
+          <a:effectLst/>
+        </p:spPr>
+        <p:txBody>
+          <a:bodyPr wrap="none" lIns="18288" rIns="18288" tIns="18288" bIns="18288" anchor="t">
+            <a:spAutoFit/>
+          </a:bodyPr>
+          <a:lstStyle/>
+          <a:p>
+            <a:pPr algn="ctr">
+              <a:spcAft>
+                <a:spcPts val="0"/>
+              </a:spcAft>
+            </a:pPr>
+            <a:r>
+              <a:rPr sz="2000" b="1" i="0">
+                <a:solidFill>
+                  <a:srgbClr val="F2B880"/>
+                </a:solidFill>
+                <a:latin typeface="Arial"/>
+              </a:rPr>
+              <a:t>Γ</a:t>
+            </a:r>
+          </a:p>
+        </p:txBody>
+      </p:sp>
+      <p:sp>
+        <p:nvSpPr>
+          <p:cNvPr id="7" name="C1-E28 rect 5" descr="sci-ppt:o005"/>
+          <p:cNvSpPr/>
+          <p:nvPr/>
+        </p:nvSpPr>
+        <p:spPr>
+          <a:xfrm>
+            <a:off x="731520" y="5394960"/>
+            <a:ext cx="4754880" cy="237744"/>
+          </a:xfrm>
+          <a:prstGeom prst="rect">
+            <a:avLst/>
+          </a:prstGeom>
+          <a:solidFill>
+            <a:srgbClr val="3A5362"/>
+          </a:solidFill>
+          <a:ln w="16510">
+            <a:solidFill>
+              <a:srgbClr val="B4C7D2"/>
+            </a:solidFill>
+          </a:ln>
+          <a:effectLst/>
+        </p:spPr>
+        <p:txBody>
+          <a:bodyPr rtlCol="0" anchor="ctr"/>
+          <a:lstStyle/>
+          <a:p>
+            <a:pPr algn="ctr"/>
+          </a:p>
+        </p:txBody>
+      </p:sp>
       <p:cxnSp>
         <p:nvCxnSpPr>
-          <p:cNvPr id="7" name="C1-E28 arrow 5" descr="sci-ppt:o005"/>
+          <p:cNvPr id="8" name="C1-E28 line 6" descr="sci-ppt:o006"/>
           <p:cNvCxnSpPr/>
           <p:nvPr/>
         </p:nvCxnSpPr>
         <p:spPr>
-          <a:xfrm flipH="1">
-            <a:off x="3080264" y="2838618"/>
-            <a:ext cx="636678" cy="445806"/>
+          <a:xfrm>
+            <a:off x="749808" y="5632704"/>
+            <a:ext cx="137160" cy="155448"/>
           </a:xfrm>
           <a:prstGeom prst="line">
             <a:avLst/>
           </a:prstGeom>
-          <a:ln w="38100">
+          <a:ln w="12700">
             <a:solidFill>
-              <a:srgbClr val="F28BA0"/>
+              <a:srgbClr val="B4C7D2"/>
+            </a:solidFill>
+          </a:ln>
+          <a:effectLst/>
+        </p:spPr>
+      </p:cxnSp>
+      <p:cxnSp>
+        <p:nvCxnSpPr>
+          <p:cNvPr id="9" name="C1-E28 line 7" descr="sci-ppt:o007"/>
+          <p:cNvCxnSpPr/>
+          <p:nvPr/>
+        </p:nvCxnSpPr>
+        <p:spPr>
+          <a:xfrm>
+            <a:off x="932688" y="5632704"/>
+            <a:ext cx="137160" cy="155448"/>
+          </a:xfrm>
+          <a:prstGeom prst="line">
+            <a:avLst/>
+          </a:prstGeom>
+          <a:ln w="12700">
+            <a:solidFill>
+              <a:srgbClr val="B4C7D2"/>
+            </a:solidFill>
+          </a:ln>
+          <a:effectLst/>
+        </p:spPr>
+      </p:cxnSp>
+      <p:cxnSp>
+        <p:nvCxnSpPr>
+          <p:cNvPr id="10" name="C1-E28 line 8" descr="sci-ppt:o008"/>
+          <p:cNvCxnSpPr/>
+          <p:nvPr/>
+        </p:nvCxnSpPr>
+        <p:spPr>
+          <a:xfrm>
+            <a:off x="1115568" y="5632704"/>
+            <a:ext cx="137160" cy="155448"/>
+          </a:xfrm>
+          <a:prstGeom prst="line">
+            <a:avLst/>
+          </a:prstGeom>
+          <a:ln w="12700">
+            <a:solidFill>
+              <a:srgbClr val="B4C7D2"/>
+            </a:solidFill>
+          </a:ln>
+          <a:effectLst/>
+        </p:spPr>
+      </p:cxnSp>
+      <p:cxnSp>
+        <p:nvCxnSpPr>
+          <p:cNvPr id="11" name="C1-E28 line 9" descr="sci-ppt:o009"/>
+          <p:cNvCxnSpPr/>
+          <p:nvPr/>
+        </p:nvCxnSpPr>
+        <p:spPr>
+          <a:xfrm>
+            <a:off x="1298448" y="5632704"/>
+            <a:ext cx="137160" cy="155448"/>
+          </a:xfrm>
+          <a:prstGeom prst="line">
+            <a:avLst/>
+          </a:prstGeom>
+          <a:ln w="12700">
+            <a:solidFill>
+              <a:srgbClr val="B4C7D2"/>
+            </a:solidFill>
+          </a:ln>
+          <a:effectLst/>
+        </p:spPr>
+      </p:cxnSp>
+      <p:cxnSp>
+        <p:nvCxnSpPr>
+          <p:cNvPr id="12" name="C1-E28 line 10" descr="sci-ppt:o010"/>
+          <p:cNvCxnSpPr/>
+          <p:nvPr/>
+        </p:nvCxnSpPr>
+        <p:spPr>
+          <a:xfrm>
+            <a:off x="1481328" y="5632704"/>
+            <a:ext cx="137160" cy="155448"/>
+          </a:xfrm>
+          <a:prstGeom prst="line">
+            <a:avLst/>
+          </a:prstGeom>
+          <a:ln w="12700">
+            <a:solidFill>
+              <a:srgbClr val="B4C7D2"/>
+            </a:solidFill>
+          </a:ln>
+          <a:effectLst/>
+        </p:spPr>
+      </p:cxnSp>
+      <p:cxnSp>
+        <p:nvCxnSpPr>
+          <p:cNvPr id="13" name="C1-E28 line 11" descr="sci-ppt:o011"/>
+          <p:cNvCxnSpPr/>
+          <p:nvPr/>
+        </p:nvCxnSpPr>
+        <p:spPr>
+          <a:xfrm>
+            <a:off x="1664208" y="5632704"/>
+            <a:ext cx="137160" cy="155448"/>
+          </a:xfrm>
+          <a:prstGeom prst="line">
+            <a:avLst/>
+          </a:prstGeom>
+          <a:ln w="12700">
+            <a:solidFill>
+              <a:srgbClr val="B4C7D2"/>
+            </a:solidFill>
+          </a:ln>
+          <a:effectLst/>
+        </p:spPr>
+      </p:cxnSp>
+      <p:cxnSp>
+        <p:nvCxnSpPr>
+          <p:cNvPr id="14" name="C1-E28 line 12" descr="sci-ppt:o012"/>
+          <p:cNvCxnSpPr/>
+          <p:nvPr/>
+        </p:nvCxnSpPr>
+        <p:spPr>
+          <a:xfrm>
+            <a:off x="1847088" y="5632704"/>
+            <a:ext cx="137160" cy="155448"/>
+          </a:xfrm>
+          <a:prstGeom prst="line">
+            <a:avLst/>
+          </a:prstGeom>
+          <a:ln w="12700">
+            <a:solidFill>
+              <a:srgbClr val="B4C7D2"/>
+            </a:solidFill>
+          </a:ln>
+          <a:effectLst/>
+        </p:spPr>
+      </p:cxnSp>
+      <p:cxnSp>
+        <p:nvCxnSpPr>
+          <p:cNvPr id="15" name="C1-E28 line 13" descr="sci-ppt:o013"/>
+          <p:cNvCxnSpPr/>
+          <p:nvPr/>
+        </p:nvCxnSpPr>
+        <p:spPr>
+          <a:xfrm>
+            <a:off x="2029968" y="5632704"/>
+            <a:ext cx="137160" cy="155448"/>
+          </a:xfrm>
+          <a:prstGeom prst="line">
+            <a:avLst/>
+          </a:prstGeom>
+          <a:ln w="12700">
+            <a:solidFill>
+              <a:srgbClr val="B4C7D2"/>
+            </a:solidFill>
+          </a:ln>
+          <a:effectLst/>
+        </p:spPr>
+      </p:cxnSp>
+      <p:cxnSp>
+        <p:nvCxnSpPr>
+          <p:cNvPr id="16" name="C1-E28 line 14" descr="sci-ppt:o014"/>
+          <p:cNvCxnSpPr/>
+          <p:nvPr/>
+        </p:nvCxnSpPr>
+        <p:spPr>
+          <a:xfrm>
+            <a:off x="2212848" y="5632704"/>
+            <a:ext cx="137160" cy="155448"/>
+          </a:xfrm>
+          <a:prstGeom prst="line">
+            <a:avLst/>
+          </a:prstGeom>
+          <a:ln w="12700">
+            <a:solidFill>
+              <a:srgbClr val="B4C7D2"/>
+            </a:solidFill>
+          </a:ln>
+          <a:effectLst/>
+        </p:spPr>
+      </p:cxnSp>
+      <p:cxnSp>
+        <p:nvCxnSpPr>
+          <p:cNvPr id="17" name="C1-E28 line 15" descr="sci-ppt:o015"/>
+          <p:cNvCxnSpPr/>
+          <p:nvPr/>
+        </p:nvCxnSpPr>
+        <p:spPr>
+          <a:xfrm>
+            <a:off x="2395728" y="5632704"/>
+            <a:ext cx="137160" cy="155448"/>
+          </a:xfrm>
+          <a:prstGeom prst="line">
+            <a:avLst/>
+          </a:prstGeom>
+          <a:ln w="12700">
+            <a:solidFill>
+              <a:srgbClr val="B4C7D2"/>
+            </a:solidFill>
+          </a:ln>
+          <a:effectLst/>
+        </p:spPr>
+      </p:cxnSp>
+      <p:cxnSp>
+        <p:nvCxnSpPr>
+          <p:cNvPr id="18" name="C1-E28 line 16" descr="sci-ppt:o016"/>
+          <p:cNvCxnSpPr/>
+          <p:nvPr/>
+        </p:nvCxnSpPr>
+        <p:spPr>
+          <a:xfrm>
+            <a:off x="2578608" y="5632704"/>
+            <a:ext cx="137160" cy="155448"/>
+          </a:xfrm>
+          <a:prstGeom prst="line">
+            <a:avLst/>
+          </a:prstGeom>
+          <a:ln w="12700">
+            <a:solidFill>
+              <a:srgbClr val="B4C7D2"/>
+            </a:solidFill>
+          </a:ln>
+          <a:effectLst/>
+        </p:spPr>
+      </p:cxnSp>
+      <p:cxnSp>
+        <p:nvCxnSpPr>
+          <p:cNvPr id="19" name="C1-E28 line 17" descr="sci-ppt:o017"/>
+          <p:cNvCxnSpPr/>
+          <p:nvPr/>
+        </p:nvCxnSpPr>
+        <p:spPr>
+          <a:xfrm>
+            <a:off x="2761488" y="5632704"/>
+            <a:ext cx="137160" cy="155448"/>
+          </a:xfrm>
+          <a:prstGeom prst="line">
+            <a:avLst/>
+          </a:prstGeom>
+          <a:ln w="12700">
+            <a:solidFill>
+              <a:srgbClr val="B4C7D2"/>
+            </a:solidFill>
+          </a:ln>
+          <a:effectLst/>
+        </p:spPr>
+      </p:cxnSp>
+      <p:cxnSp>
+        <p:nvCxnSpPr>
+          <p:cNvPr id="20" name="C1-E28 line 18" descr="sci-ppt:o018"/>
+          <p:cNvCxnSpPr/>
+          <p:nvPr/>
+        </p:nvCxnSpPr>
+        <p:spPr>
+          <a:xfrm>
+            <a:off x="2944368" y="5632704"/>
+            <a:ext cx="137160" cy="155448"/>
+          </a:xfrm>
+          <a:prstGeom prst="line">
+            <a:avLst/>
+          </a:prstGeom>
+          <a:ln w="12700">
+            <a:solidFill>
+              <a:srgbClr val="B4C7D2"/>
+            </a:solidFill>
+          </a:ln>
+          <a:effectLst/>
+        </p:spPr>
+      </p:cxnSp>
+      <p:cxnSp>
+        <p:nvCxnSpPr>
+          <p:cNvPr id="21" name="C1-E28 line 19" descr="sci-ppt:o019"/>
+          <p:cNvCxnSpPr/>
+          <p:nvPr/>
+        </p:nvCxnSpPr>
+        <p:spPr>
+          <a:xfrm>
+            <a:off x="3127248" y="5632704"/>
+            <a:ext cx="137160" cy="155448"/>
+          </a:xfrm>
+          <a:prstGeom prst="line">
+            <a:avLst/>
+          </a:prstGeom>
+          <a:ln w="12700">
+            <a:solidFill>
+              <a:srgbClr val="B4C7D2"/>
+            </a:solidFill>
+          </a:ln>
+          <a:effectLst/>
+        </p:spPr>
+      </p:cxnSp>
+      <p:cxnSp>
+        <p:nvCxnSpPr>
+          <p:cNvPr id="22" name="C1-E28 line 20" descr="sci-ppt:o020"/>
+          <p:cNvCxnSpPr/>
+          <p:nvPr/>
+        </p:nvCxnSpPr>
+        <p:spPr>
+          <a:xfrm>
+            <a:off x="3310128" y="5632704"/>
+            <a:ext cx="137160" cy="155448"/>
+          </a:xfrm>
+          <a:prstGeom prst="line">
+            <a:avLst/>
+          </a:prstGeom>
+          <a:ln w="12700">
+            <a:solidFill>
+              <a:srgbClr val="B4C7D2"/>
+            </a:solidFill>
+          </a:ln>
+          <a:effectLst/>
+        </p:spPr>
+      </p:cxnSp>
+      <p:cxnSp>
+        <p:nvCxnSpPr>
+          <p:cNvPr id="23" name="C1-E28 line 21" descr="sci-ppt:o021"/>
+          <p:cNvCxnSpPr/>
+          <p:nvPr/>
+        </p:nvCxnSpPr>
+        <p:spPr>
+          <a:xfrm>
+            <a:off x="3493008" y="5632704"/>
+            <a:ext cx="137160" cy="155448"/>
+          </a:xfrm>
+          <a:prstGeom prst="line">
+            <a:avLst/>
+          </a:prstGeom>
+          <a:ln w="12700">
+            <a:solidFill>
+              <a:srgbClr val="B4C7D2"/>
+            </a:solidFill>
+          </a:ln>
+          <a:effectLst/>
+        </p:spPr>
+      </p:cxnSp>
+      <p:cxnSp>
+        <p:nvCxnSpPr>
+          <p:cNvPr id="24" name="C1-E28 line 22" descr="sci-ppt:o022"/>
+          <p:cNvCxnSpPr/>
+          <p:nvPr/>
+        </p:nvCxnSpPr>
+        <p:spPr>
+          <a:xfrm>
+            <a:off x="3675887" y="5632704"/>
+            <a:ext cx="137161" cy="155448"/>
+          </a:xfrm>
+          <a:prstGeom prst="line">
+            <a:avLst/>
+          </a:prstGeom>
+          <a:ln w="12700">
+            <a:solidFill>
+              <a:srgbClr val="B4C7D2"/>
+            </a:solidFill>
+          </a:ln>
+          <a:effectLst/>
+        </p:spPr>
+      </p:cxnSp>
+      <p:cxnSp>
+        <p:nvCxnSpPr>
+          <p:cNvPr id="25" name="C1-E28 line 23" descr="sci-ppt:o023"/>
+          <p:cNvCxnSpPr/>
+          <p:nvPr/>
+        </p:nvCxnSpPr>
+        <p:spPr>
+          <a:xfrm>
+            <a:off x="3858768" y="5632704"/>
+            <a:ext cx="137160" cy="155448"/>
+          </a:xfrm>
+          <a:prstGeom prst="line">
+            <a:avLst/>
+          </a:prstGeom>
+          <a:ln w="12700">
+            <a:solidFill>
+              <a:srgbClr val="B4C7D2"/>
+            </a:solidFill>
+          </a:ln>
+          <a:effectLst/>
+        </p:spPr>
+      </p:cxnSp>
+      <p:cxnSp>
+        <p:nvCxnSpPr>
+          <p:cNvPr id="26" name="C1-E28 line 24" descr="sci-ppt:o024"/>
+          <p:cNvCxnSpPr/>
+          <p:nvPr/>
+        </p:nvCxnSpPr>
+        <p:spPr>
+          <a:xfrm>
+            <a:off x="4041648" y="5632704"/>
+            <a:ext cx="137160" cy="155448"/>
+          </a:xfrm>
+          <a:prstGeom prst="line">
+            <a:avLst/>
+          </a:prstGeom>
+          <a:ln w="12700">
+            <a:solidFill>
+              <a:srgbClr val="B4C7D2"/>
+            </a:solidFill>
+          </a:ln>
+          <a:effectLst/>
+        </p:spPr>
+      </p:cxnSp>
+      <p:cxnSp>
+        <p:nvCxnSpPr>
+          <p:cNvPr id="27" name="C1-E28 line 25" descr="sci-ppt:o025"/>
+          <p:cNvCxnSpPr/>
+          <p:nvPr/>
+        </p:nvCxnSpPr>
+        <p:spPr>
+          <a:xfrm>
+            <a:off x="4224528" y="5632704"/>
+            <a:ext cx="137160" cy="155448"/>
+          </a:xfrm>
+          <a:prstGeom prst="line">
+            <a:avLst/>
+          </a:prstGeom>
+          <a:ln w="12700">
+            <a:solidFill>
+              <a:srgbClr val="B4C7D2"/>
+            </a:solidFill>
+          </a:ln>
+          <a:effectLst/>
+        </p:spPr>
+      </p:cxnSp>
+      <p:cxnSp>
+        <p:nvCxnSpPr>
+          <p:cNvPr id="28" name="C1-E28 line 26" descr="sci-ppt:o026"/>
+          <p:cNvCxnSpPr/>
+          <p:nvPr/>
+        </p:nvCxnSpPr>
+        <p:spPr>
+          <a:xfrm>
+            <a:off x="4407407" y="5632704"/>
+            <a:ext cx="137161" cy="155448"/>
+          </a:xfrm>
+          <a:prstGeom prst="line">
+            <a:avLst/>
+          </a:prstGeom>
+          <a:ln w="12700">
+            <a:solidFill>
+              <a:srgbClr val="B4C7D2"/>
+            </a:solidFill>
+          </a:ln>
+          <a:effectLst/>
+        </p:spPr>
+      </p:cxnSp>
+      <p:cxnSp>
+        <p:nvCxnSpPr>
+          <p:cNvPr id="29" name="C1-E28 line 27" descr="sci-ppt:o027"/>
+          <p:cNvCxnSpPr/>
+          <p:nvPr/>
+        </p:nvCxnSpPr>
+        <p:spPr>
+          <a:xfrm>
+            <a:off x="4590288" y="5632704"/>
+            <a:ext cx="137160" cy="155448"/>
+          </a:xfrm>
+          <a:prstGeom prst="line">
+            <a:avLst/>
+          </a:prstGeom>
+          <a:ln w="12700">
+            <a:solidFill>
+              <a:srgbClr val="B4C7D2"/>
+            </a:solidFill>
+          </a:ln>
+          <a:effectLst/>
+        </p:spPr>
+      </p:cxnSp>
+      <p:cxnSp>
+        <p:nvCxnSpPr>
+          <p:cNvPr id="30" name="C1-E28 line 28" descr="sci-ppt:o028"/>
+          <p:cNvCxnSpPr/>
+          <p:nvPr/>
+        </p:nvCxnSpPr>
+        <p:spPr>
+          <a:xfrm>
+            <a:off x="4773168" y="5632704"/>
+            <a:ext cx="137160" cy="155448"/>
+          </a:xfrm>
+          <a:prstGeom prst="line">
+            <a:avLst/>
+          </a:prstGeom>
+          <a:ln w="12700">
+            <a:solidFill>
+              <a:srgbClr val="B4C7D2"/>
+            </a:solidFill>
+          </a:ln>
+          <a:effectLst/>
+        </p:spPr>
+      </p:cxnSp>
+      <p:cxnSp>
+        <p:nvCxnSpPr>
+          <p:cNvPr id="31" name="C1-E28 line 29" descr="sci-ppt:o029"/>
+          <p:cNvCxnSpPr/>
+          <p:nvPr/>
+        </p:nvCxnSpPr>
+        <p:spPr>
+          <a:xfrm>
+            <a:off x="4956048" y="5632704"/>
+            <a:ext cx="137160" cy="155448"/>
+          </a:xfrm>
+          <a:prstGeom prst="line">
+            <a:avLst/>
+          </a:prstGeom>
+          <a:ln w="12700">
+            <a:solidFill>
+              <a:srgbClr val="B4C7D2"/>
+            </a:solidFill>
+          </a:ln>
+          <a:effectLst/>
+        </p:spPr>
+      </p:cxnSp>
+      <p:cxnSp>
+        <p:nvCxnSpPr>
+          <p:cNvPr id="32" name="C1-E28 line 30" descr="sci-ppt:o030"/>
+          <p:cNvCxnSpPr/>
+          <p:nvPr/>
+        </p:nvCxnSpPr>
+        <p:spPr>
+          <a:xfrm>
+            <a:off x="5138928" y="5632704"/>
+            <a:ext cx="137160" cy="155448"/>
+          </a:xfrm>
+          <a:prstGeom prst="line">
+            <a:avLst/>
+          </a:prstGeom>
+          <a:ln w="12700">
+            <a:solidFill>
+              <a:srgbClr val="B4C7D2"/>
+            </a:solidFill>
+          </a:ln>
+          <a:effectLst/>
+        </p:spPr>
+      </p:cxnSp>
+      <p:cxnSp>
+        <p:nvCxnSpPr>
+          <p:cNvPr id="33" name="C1-E28 line 31" descr="sci-ppt:o031"/>
+          <p:cNvCxnSpPr/>
+          <p:nvPr/>
+        </p:nvCxnSpPr>
+        <p:spPr>
+          <a:xfrm>
+            <a:off x="5321807" y="5632704"/>
+            <a:ext cx="137161" cy="155448"/>
+          </a:xfrm>
+          <a:prstGeom prst="line">
+            <a:avLst/>
+          </a:prstGeom>
+          <a:ln w="12700">
+            <a:solidFill>
+              <a:srgbClr val="B4C7D2"/>
+            </a:solidFill>
+          </a:ln>
+          <a:effectLst/>
+        </p:spPr>
+      </p:cxnSp>
+      <p:cxnSp>
+        <p:nvCxnSpPr>
+          <p:cNvPr id="34" name="C1-E28 arrow 32" descr="sci-ppt:o032"/>
+          <p:cNvCxnSpPr/>
+          <p:nvPr/>
+        </p:nvCxnSpPr>
+        <p:spPr>
+          <a:xfrm>
+            <a:off x="4837724" y="3383280"/>
+            <a:ext cx="502920" cy="0"/>
+          </a:xfrm>
+          <a:prstGeom prst="line">
+            <a:avLst/>
+          </a:prstGeom>
+          <a:ln w="27940">
+            <a:solidFill>
+              <a:srgbClr val="8EDBD4"/>
             </a:solidFill>
             <a:headEnd type="none" w="med" len="med"/>
             <a:tailEnd type="triangle" w="med" len="med"/>
@@ -3298,21 +4159,21 @@
       </p:cxnSp>
       <p:cxnSp>
         <p:nvCxnSpPr>
-          <p:cNvPr id="8" name="C1-E28 arrow 6" descr="sci-ppt:o006"/>
+          <p:cNvPr id="35" name="C1-E28 arrow 33" descr="sci-ppt:o033"/>
           <p:cNvCxnSpPr/>
           <p:nvPr/>
         </p:nvCxnSpPr>
         <p:spPr>
-          <a:xfrm flipH="1" flipV="1">
-            <a:off x="3349807" y="2314295"/>
-            <a:ext cx="367135" cy="524323"/>
+          <a:xfrm flipV="1">
+            <a:off x="3698885" y="2192509"/>
+            <a:ext cx="251460" cy="435542"/>
           </a:xfrm>
           <a:prstGeom prst="line">
             <a:avLst/>
           </a:prstGeom>
-          <a:ln w="30480">
+          <a:ln w="27940">
             <a:solidFill>
-              <a:srgbClr val="7FC8F8"/>
+              <a:srgbClr val="8EDBD4"/>
             </a:solidFill>
             <a:headEnd type="none" w="med" len="med"/>
             <a:tailEnd type="triangle" w="med" len="med"/>
@@ -3322,21 +4183,21 @@
       </p:cxnSp>
       <p:cxnSp>
         <p:nvCxnSpPr>
-          <p:cNvPr id="9" name="C1-E28 arrow 7" descr="sci-ppt:o007"/>
+          <p:cNvPr id="36" name="C1-E28 arrow 34" descr="sci-ppt:o034"/>
           <p:cNvCxnSpPr/>
           <p:nvPr/>
         </p:nvCxnSpPr>
         <p:spPr>
-          <a:xfrm>
-            <a:off x="2240825" y="2443093"/>
-            <a:ext cx="328476" cy="704419"/>
+          <a:xfrm flipH="1" flipV="1">
+            <a:off x="2343287" y="2289437"/>
+            <a:ext cx="251460" cy="435541"/>
           </a:xfrm>
           <a:prstGeom prst="line">
             <a:avLst/>
           </a:prstGeom>
-          <a:ln w="38100">
+          <a:ln w="27940">
             <a:solidFill>
-              <a:srgbClr val="F28BA0"/>
+              <a:srgbClr val="8EDBD4"/>
             </a:solidFill>
             <a:headEnd type="none" w="med" len="med"/>
             <a:tailEnd type="triangle" w="med" len="med"/>
@@ -3346,21 +4207,21 @@
       </p:cxnSp>
       <p:cxnSp>
         <p:nvCxnSpPr>
-          <p:cNvPr id="10" name="C1-E28 arrow 8" descr="sci-ppt:o008"/>
+          <p:cNvPr id="37" name="C1-E28 arrow 35" descr="sci-ppt:o035"/>
           <p:cNvCxnSpPr/>
           <p:nvPr/>
         </p:nvCxnSpPr>
         <p:spPr>
           <a:xfrm flipH="1">
-            <a:off x="1660715" y="2443093"/>
-            <a:ext cx="580110" cy="270510"/>
+            <a:off x="1180124" y="3383280"/>
+            <a:ext cx="502920" cy="0"/>
           </a:xfrm>
           <a:prstGeom prst="line">
             <a:avLst/>
           </a:prstGeom>
-          <a:ln w="30480">
+          <a:ln w="27940">
             <a:solidFill>
-              <a:srgbClr val="7FC8F8"/>
+              <a:srgbClr val="8EDBD4"/>
             </a:solidFill>
             <a:headEnd type="none" w="med" len="med"/>
             <a:tailEnd type="triangle" w="med" len="med"/>
@@ -3370,21 +4231,21 @@
       </p:cxnSp>
       <p:cxnSp>
         <p:nvCxnSpPr>
-          <p:cNvPr id="11" name="C1-E28 arrow 9" descr="sci-ppt:o009"/>
+          <p:cNvPr id="38" name="C1-E28 arrow 36" descr="sci-ppt:o036"/>
           <p:cNvCxnSpPr/>
           <p:nvPr/>
         </p:nvCxnSpPr>
         <p:spPr>
-          <a:xfrm flipV="1">
-            <a:off x="1626168" y="3661174"/>
-            <a:ext cx="730367" cy="265832"/>
+          <a:xfrm flipH="1">
+            <a:off x="2343287" y="4041581"/>
+            <a:ext cx="251460" cy="435541"/>
           </a:xfrm>
           <a:prstGeom prst="line">
             <a:avLst/>
           </a:prstGeom>
-          <a:ln w="38100">
+          <a:ln w="27940">
             <a:solidFill>
-              <a:srgbClr val="F28BA0"/>
+              <a:srgbClr val="8EDBD4"/>
             </a:solidFill>
             <a:headEnd type="none" w="med" len="med"/>
             <a:tailEnd type="triangle" w="med" len="med"/>
@@ -3394,21 +4255,21 @@
       </p:cxnSp>
       <p:cxnSp>
         <p:nvCxnSpPr>
-          <p:cNvPr id="12" name="C1-E28 arrow 10" descr="sci-ppt:o010"/>
+          <p:cNvPr id="39" name="C1-E28 arrow 37" descr="sci-ppt:o037"/>
           <p:cNvCxnSpPr/>
           <p:nvPr/>
         </p:nvCxnSpPr>
         <p:spPr>
           <a:xfrm>
-            <a:off x="1626168" y="3927006"/>
-            <a:ext cx="218920" cy="601478"/>
+            <a:off x="3698885" y="4138508"/>
+            <a:ext cx="251460" cy="435542"/>
           </a:xfrm>
           <a:prstGeom prst="line">
             <a:avLst/>
           </a:prstGeom>
-          <a:ln w="30480">
+          <a:ln w="27940">
             <a:solidFill>
-              <a:srgbClr val="7FC8F8"/>
+              <a:srgbClr val="8EDBD4"/>
             </a:solidFill>
             <a:headEnd type="none" w="med" len="med"/>
             <a:tailEnd type="triangle" w="med" len="med"/>
@@ -3418,14 +4279,838 @@
       </p:cxnSp>
       <p:sp>
         <p:nvSpPr>
-          <p:cNvPr id="13" name="C1-E28 text 11" descr="sci-ppt:o011"/>
+          <p:cNvPr id="40" name="C1-E28 text 38" descr="sci-ppt:o038"/>
           <p:cNvSpPr txBox="1"/>
           <p:nvPr/>
         </p:nvSpPr>
         <p:spPr>
           <a:xfrm>
-            <a:off x="3749039" y="1645920"/>
-            <a:ext cx="2377440" cy="247142"/>
+            <a:off x="502920" y="4846320"/>
+            <a:ext cx="5212080" cy="417576"/>
+          </a:xfrm>
+          <a:prstGeom prst="rect">
+            <a:avLst/>
+          </a:prstGeom>
+          <a:noFill/>
+          <a:effectLst/>
+        </p:spPr>
+        <p:txBody>
+          <a:bodyPr wrap="none" lIns="18288" rIns="18288" tIns="18288" bIns="18288" anchor="t">
+            <a:spAutoFit/>
+          </a:bodyPr>
+          <a:lstStyle/>
+          <a:p>
+            <a:pPr algn="l">
+              <a:spcAft>
+                <a:spcPts val="0"/>
+              </a:spcAft>
+            </a:pPr>
+            <a:r>
+              <a:rPr sz="1200" b="0" i="0">
+                <a:solidFill>
+                  <a:srgbClr val="E7F0F3"/>
+                </a:solidFill>
+                <a:latin typeface="Arial"/>
+              </a:rPr>
+              <a:t>Surface velocity u = ∇φ differs from point to point; the shape</a:t>
+            </a:r>
+          </a:p>
+          <a:p>
+            <a:pPr algn="l">
+              <a:spcAft>
+                <a:spcPts val="0"/>
+              </a:spcAft>
+            </a:pPr>
+            <a:r>
+              <a:rPr sz="1200" b="0" i="0">
+                <a:solidFill>
+                  <a:srgbClr val="E7F0F3"/>
+                </a:solidFill>
+                <a:latin typeface="Arial"/>
+              </a:rPr>
+              <a:t>changes as it is carried along.</a:t>
+            </a:r>
+          </a:p>
+        </p:txBody>
+      </p:sp>
+      <p:sp>
+        <p:nvSpPr>
+          <p:cNvPr id="41" name="C1-E28 text 39" descr="sci-ppt:o039"/>
+          <p:cNvSpPr txBox="1"/>
+          <p:nvPr/>
+        </p:nvSpPr>
+        <p:spPr>
+          <a:xfrm>
+            <a:off x="6126480" y="914400"/>
+            <a:ext cx="5669280" cy="262636"/>
+          </a:xfrm>
+          <a:prstGeom prst="rect">
+            <a:avLst/>
+          </a:prstGeom>
+          <a:noFill/>
+          <a:effectLst/>
+        </p:spPr>
+        <p:txBody>
+          <a:bodyPr wrap="none" lIns="18288" rIns="18288" tIns="18288" bIns="18288" anchor="t">
+            <a:spAutoFit/>
+          </a:bodyPr>
+          <a:lstStyle/>
+          <a:p>
+            <a:pPr algn="l">
+              <a:spcAft>
+                <a:spcPts val="0"/>
+              </a:spcAft>
+            </a:pPr>
+            <a:r>
+              <a:rPr sz="1400" b="1" i="0">
+                <a:solidFill>
+                  <a:srgbClr val="8EDBD4"/>
+                </a:solidFill>
+                <a:latin typeface="Arial"/>
+              </a:rPr>
+              <a:t>Closure loop (inviscid, before impact)</a:t>
+            </a:r>
+          </a:p>
+        </p:txBody>
+      </p:sp>
+      <p:sp>
+        <p:nvSpPr>
+          <p:cNvPr id="42" name="C1-E28 round_rect 40" descr="sci-ppt:o040"/>
+          <p:cNvSpPr/>
+          <p:nvPr/>
+        </p:nvSpPr>
+        <p:spPr>
+          <a:xfrm>
+            <a:off x="6126480" y="1371600"/>
+            <a:ext cx="5715000" cy="914400"/>
+          </a:xfrm>
+          <a:prstGeom prst="roundRect">
+            <a:avLst/>
+          </a:prstGeom>
+          <a:solidFill>
+            <a:srgbClr val="213E4B"/>
+          </a:solidFill>
+          <a:ln w="20320">
+            <a:solidFill>
+              <a:srgbClr val="8EDBD4"/>
+            </a:solidFill>
+          </a:ln>
+          <a:effectLst/>
+        </p:spPr>
+        <p:txBody>
+          <a:bodyPr rtlCol="0" anchor="ctr"/>
+          <a:lstStyle/>
+          <a:p>
+            <a:pPr algn="ctr"/>
+          </a:p>
+        </p:txBody>
+      </p:sp>
+      <p:sp>
+        <p:nvSpPr>
+          <p:cNvPr id="43" name="C1-E28 ellipse 41" descr="sci-ppt:o041"/>
+          <p:cNvSpPr/>
+          <p:nvPr/>
+        </p:nvSpPr>
+        <p:spPr>
+          <a:xfrm>
+            <a:off x="6227064" y="1609344"/>
+            <a:ext cx="438912" cy="438912"/>
+          </a:xfrm>
+          <a:prstGeom prst="ellipse">
+            <a:avLst/>
+          </a:prstGeom>
+          <a:solidFill>
+            <a:srgbClr val="8EDBD4"/>
+          </a:solidFill>
+          <a:ln w="12700">
+            <a:solidFill>
+              <a:srgbClr val="8EDBD4"/>
+            </a:solidFill>
+          </a:ln>
+          <a:effectLst/>
+        </p:spPr>
+        <p:txBody>
+          <a:bodyPr rtlCol="0" anchor="ctr"/>
+          <a:lstStyle/>
+          <a:p>
+            <a:pPr algn="ctr"/>
+          </a:p>
+        </p:txBody>
+      </p:sp>
+      <p:sp>
+        <p:nvSpPr>
+          <p:cNvPr id="44" name="C1-E28 text 42" descr="sci-ppt:o042"/>
+          <p:cNvSpPr txBox="1"/>
+          <p:nvPr/>
+        </p:nvSpPr>
+        <p:spPr>
+          <a:xfrm>
+            <a:off x="6336792" y="1645920"/>
+            <a:ext cx="228600" cy="247142"/>
+          </a:xfrm>
+          <a:prstGeom prst="rect">
+            <a:avLst/>
+          </a:prstGeom>
+          <a:noFill/>
+          <a:effectLst/>
+        </p:spPr>
+        <p:txBody>
+          <a:bodyPr wrap="none" lIns="18288" rIns="18288" tIns="18288" bIns="18288" anchor="t">
+            <a:spAutoFit/>
+          </a:bodyPr>
+          <a:lstStyle/>
+          <a:p>
+            <a:pPr algn="ctr">
+              <a:spcAft>
+                <a:spcPts val="0"/>
+              </a:spcAft>
+            </a:pPr>
+            <a:r>
+              <a:rPr sz="1300" b="1" i="0">
+                <a:solidFill>
+                  <a:srgbClr val="142632"/>
+                </a:solidFill>
+                <a:latin typeface="Arial"/>
+              </a:rPr>
+              <a:t>1</a:t>
+            </a:r>
+          </a:p>
+        </p:txBody>
+      </p:sp>
+      <p:sp>
+        <p:nvSpPr>
+          <p:cNvPr id="45" name="C1-E28 text 43" descr="sci-ppt:o043"/>
+          <p:cNvSpPr txBox="1"/>
+          <p:nvPr/>
+        </p:nvSpPr>
+        <p:spPr>
+          <a:xfrm>
+            <a:off x="6858000" y="1444752"/>
+            <a:ext cx="4892040" cy="247142"/>
+          </a:xfrm>
+          <a:prstGeom prst="rect">
+            <a:avLst/>
+          </a:prstGeom>
+          <a:noFill/>
+          <a:effectLst/>
+        </p:spPr>
+        <p:txBody>
+          <a:bodyPr wrap="none" lIns="18288" rIns="18288" tIns="18288" bIns="18288" anchor="t">
+            <a:spAutoFit/>
+          </a:bodyPr>
+          <a:lstStyle/>
+          <a:p>
+            <a:pPr algn="l">
+              <a:spcAft>
+                <a:spcPts val="0"/>
+              </a:spcAft>
+            </a:pPr>
+            <a:r>
+              <a:rPr sz="1300" b="1" i="0">
+                <a:solidFill>
+                  <a:srgbClr val="8EDBD4"/>
+                </a:solidFill>
+                <a:latin typeface="Arial"/>
+              </a:rPr>
+              <a:t>Known φ on Γ</a:t>
+            </a:r>
+          </a:p>
+        </p:txBody>
+      </p:sp>
+      <p:sp>
+        <p:nvSpPr>
+          <p:cNvPr id="46" name="C1-E28 text 44" descr="sci-ppt:o044"/>
+          <p:cNvSpPr txBox="1"/>
+          <p:nvPr/>
+        </p:nvSpPr>
+        <p:spPr>
+          <a:xfrm>
+            <a:off x="6858000" y="1828800"/>
+            <a:ext cx="4892040" cy="223900"/>
+          </a:xfrm>
+          <a:prstGeom prst="rect">
+            <a:avLst/>
+          </a:prstGeom>
+          <a:noFill/>
+          <a:effectLst/>
+        </p:spPr>
+        <p:txBody>
+          <a:bodyPr wrap="none" lIns="18288" rIns="18288" tIns="18288" bIns="18288" anchor="t">
+            <a:spAutoFit/>
+          </a:bodyPr>
+          <a:lstStyle/>
+          <a:p>
+            <a:pPr algn="l">
+              <a:spcAft>
+                <a:spcPts val="0"/>
+              </a:spcAft>
+            </a:pPr>
+            <a:r>
+              <a:rPr sz="1150" b="0" i="0">
+                <a:solidFill>
+                  <a:srgbClr val="E7F0F3"/>
+                </a:solidFill>
+                <a:latin typeface="Arial"/>
+              </a:rPr>
+              <a:t>solve ∇²φ = 0 in the liquid</a:t>
+            </a:r>
+          </a:p>
+        </p:txBody>
+      </p:sp>
+      <p:cxnSp>
+        <p:nvCxnSpPr>
+          <p:cNvPr id="47" name="C1-E28 arrow 45" descr="sci-ppt:o045"/>
+          <p:cNvCxnSpPr/>
+          <p:nvPr/>
+        </p:nvCxnSpPr>
+        <p:spPr>
+          <a:xfrm>
+            <a:off x="8961120" y="2286000"/>
+            <a:ext cx="0" cy="182880"/>
+          </a:xfrm>
+          <a:prstGeom prst="line">
+            <a:avLst/>
+          </a:prstGeom>
+          <a:ln w="25400">
+            <a:solidFill>
+              <a:srgbClr val="B4C7D2"/>
+            </a:solidFill>
+            <a:headEnd type="none" w="med" len="med"/>
+            <a:tailEnd type="triangle" w="med" len="med"/>
+          </a:ln>
+          <a:effectLst/>
+        </p:spPr>
+      </p:cxnSp>
+      <p:sp>
+        <p:nvSpPr>
+          <p:cNvPr id="48" name="C1-E28 round_rect 46" descr="sci-ppt:o046"/>
+          <p:cNvSpPr/>
+          <p:nvPr/>
+        </p:nvSpPr>
+        <p:spPr>
+          <a:xfrm>
+            <a:off x="6126480" y="2468880"/>
+            <a:ext cx="5715000" cy="914400"/>
+          </a:xfrm>
+          <a:prstGeom prst="roundRect">
+            <a:avLst/>
+          </a:prstGeom>
+          <a:solidFill>
+            <a:srgbClr val="213E4B"/>
+          </a:solidFill>
+          <a:ln w="20320">
+            <a:solidFill>
+              <a:srgbClr val="7FC8F8"/>
+            </a:solidFill>
+          </a:ln>
+          <a:effectLst/>
+        </p:spPr>
+        <p:txBody>
+          <a:bodyPr rtlCol="0" anchor="ctr"/>
+          <a:lstStyle/>
+          <a:p>
+            <a:pPr algn="ctr"/>
+          </a:p>
+        </p:txBody>
+      </p:sp>
+      <p:sp>
+        <p:nvSpPr>
+          <p:cNvPr id="49" name="C1-E28 ellipse 47" descr="sci-ppt:o047"/>
+          <p:cNvSpPr/>
+          <p:nvPr/>
+        </p:nvSpPr>
+        <p:spPr>
+          <a:xfrm>
+            <a:off x="6227064" y="2706624"/>
+            <a:ext cx="438912" cy="438912"/>
+          </a:xfrm>
+          <a:prstGeom prst="ellipse">
+            <a:avLst/>
+          </a:prstGeom>
+          <a:solidFill>
+            <a:srgbClr val="7FC8F8"/>
+          </a:solidFill>
+          <a:ln w="12700">
+            <a:solidFill>
+              <a:srgbClr val="7FC8F8"/>
+            </a:solidFill>
+          </a:ln>
+          <a:effectLst/>
+        </p:spPr>
+        <p:txBody>
+          <a:bodyPr rtlCol="0" anchor="ctr"/>
+          <a:lstStyle/>
+          <a:p>
+            <a:pPr algn="ctr"/>
+          </a:p>
+        </p:txBody>
+      </p:sp>
+      <p:sp>
+        <p:nvSpPr>
+          <p:cNvPr id="50" name="C1-E28 text 48" descr="sci-ppt:o048"/>
+          <p:cNvSpPr txBox="1"/>
+          <p:nvPr/>
+        </p:nvSpPr>
+        <p:spPr>
+          <a:xfrm>
+            <a:off x="6336792" y="2743200"/>
+            <a:ext cx="228600" cy="247142"/>
+          </a:xfrm>
+          <a:prstGeom prst="rect">
+            <a:avLst/>
+          </a:prstGeom>
+          <a:noFill/>
+          <a:effectLst/>
+        </p:spPr>
+        <p:txBody>
+          <a:bodyPr wrap="none" lIns="18288" rIns="18288" tIns="18288" bIns="18288" anchor="t">
+            <a:spAutoFit/>
+          </a:bodyPr>
+          <a:lstStyle/>
+          <a:p>
+            <a:pPr algn="ctr">
+              <a:spcAft>
+                <a:spcPts val="0"/>
+              </a:spcAft>
+            </a:pPr>
+            <a:r>
+              <a:rPr sz="1300" b="1" i="0">
+                <a:solidFill>
+                  <a:srgbClr val="142632"/>
+                </a:solidFill>
+                <a:latin typeface="Arial"/>
+              </a:rPr>
+              <a:t>2</a:t>
+            </a:r>
+          </a:p>
+        </p:txBody>
+      </p:sp>
+      <p:sp>
+        <p:nvSpPr>
+          <p:cNvPr id="51" name="C1-E28 text 49" descr="sci-ppt:o049"/>
+          <p:cNvSpPr txBox="1"/>
+          <p:nvPr/>
+        </p:nvSpPr>
+        <p:spPr>
+          <a:xfrm>
+            <a:off x="6858000" y="2542032"/>
+            <a:ext cx="4892040" cy="247142"/>
+          </a:xfrm>
+          <a:prstGeom prst="rect">
+            <a:avLst/>
+          </a:prstGeom>
+          <a:noFill/>
+          <a:effectLst/>
+        </p:spPr>
+        <p:txBody>
+          <a:bodyPr wrap="none" lIns="18288" rIns="18288" tIns="18288" bIns="18288" anchor="t">
+            <a:spAutoFit/>
+          </a:bodyPr>
+          <a:lstStyle/>
+          <a:p>
+            <a:pPr algn="l">
+              <a:spcAft>
+                <a:spcPts val="0"/>
+              </a:spcAft>
+            </a:pPr>
+            <a:r>
+              <a:rPr sz="1300" b="1" i="0">
+                <a:solidFill>
+                  <a:srgbClr val="7FC8F8"/>
+                </a:solidFill>
+                <a:latin typeface="Arial"/>
+              </a:rPr>
+              <a:t>u = ∇φ at the surface</a:t>
+            </a:r>
+          </a:p>
+        </p:txBody>
+      </p:sp>
+      <p:sp>
+        <p:nvSpPr>
+          <p:cNvPr id="52" name="C1-E28 text 50" descr="sci-ppt:o050"/>
+          <p:cNvSpPr txBox="1"/>
+          <p:nvPr/>
+        </p:nvSpPr>
+        <p:spPr>
+          <a:xfrm>
+            <a:off x="6858000" y="2926080"/>
+            <a:ext cx="4892040" cy="223900"/>
+          </a:xfrm>
+          <a:prstGeom prst="rect">
+            <a:avLst/>
+          </a:prstGeom>
+          <a:noFill/>
+          <a:effectLst/>
+        </p:spPr>
+        <p:txBody>
+          <a:bodyPr wrap="none" lIns="18288" rIns="18288" tIns="18288" bIns="18288" anchor="t">
+            <a:spAutoFit/>
+          </a:bodyPr>
+          <a:lstStyle/>
+          <a:p>
+            <a:pPr algn="l">
+              <a:spcAft>
+                <a:spcPts val="0"/>
+              </a:spcAft>
+            </a:pPr>
+            <a:r>
+              <a:rPr sz="1150" b="0" i="0">
+                <a:solidFill>
+                  <a:srgbClr val="E7F0F3"/>
+                </a:solidFill>
+                <a:latin typeface="Arial"/>
+              </a:rPr>
+              <a:t>normal speed Vₙ = ∂φ/∂n</a:t>
+            </a:r>
+          </a:p>
+        </p:txBody>
+      </p:sp>
+      <p:cxnSp>
+        <p:nvCxnSpPr>
+          <p:cNvPr id="53" name="C1-E28 arrow 51" descr="sci-ppt:o051"/>
+          <p:cNvCxnSpPr/>
+          <p:nvPr/>
+        </p:nvCxnSpPr>
+        <p:spPr>
+          <a:xfrm>
+            <a:off x="8961120" y="3383280"/>
+            <a:ext cx="0" cy="182880"/>
+          </a:xfrm>
+          <a:prstGeom prst="line">
+            <a:avLst/>
+          </a:prstGeom>
+          <a:ln w="25400">
+            <a:solidFill>
+              <a:srgbClr val="B4C7D2"/>
+            </a:solidFill>
+            <a:headEnd type="none" w="med" len="med"/>
+            <a:tailEnd type="triangle" w="med" len="med"/>
+          </a:ln>
+          <a:effectLst/>
+        </p:spPr>
+      </p:cxnSp>
+      <p:sp>
+        <p:nvSpPr>
+          <p:cNvPr id="54" name="C1-E28 round_rect 52" descr="sci-ppt:o052"/>
+          <p:cNvSpPr/>
+          <p:nvPr/>
+        </p:nvSpPr>
+        <p:spPr>
+          <a:xfrm>
+            <a:off x="6126480" y="3566160"/>
+            <a:ext cx="5715000" cy="914400"/>
+          </a:xfrm>
+          <a:prstGeom prst="roundRect">
+            <a:avLst/>
+          </a:prstGeom>
+          <a:solidFill>
+            <a:srgbClr val="213E4B"/>
+          </a:solidFill>
+          <a:ln w="20320">
+            <a:solidFill>
+              <a:srgbClr val="F2B880"/>
+            </a:solidFill>
+          </a:ln>
+          <a:effectLst/>
+        </p:spPr>
+        <p:txBody>
+          <a:bodyPr rtlCol="0" anchor="ctr"/>
+          <a:lstStyle/>
+          <a:p>
+            <a:pPr algn="ctr"/>
+          </a:p>
+        </p:txBody>
+      </p:sp>
+      <p:sp>
+        <p:nvSpPr>
+          <p:cNvPr id="55" name="C1-E28 ellipse 53" descr="sci-ppt:o053"/>
+          <p:cNvSpPr/>
+          <p:nvPr/>
+        </p:nvSpPr>
+        <p:spPr>
+          <a:xfrm>
+            <a:off x="6227064" y="3803904"/>
+            <a:ext cx="438912" cy="438912"/>
+          </a:xfrm>
+          <a:prstGeom prst="ellipse">
+            <a:avLst/>
+          </a:prstGeom>
+          <a:solidFill>
+            <a:srgbClr val="F2B880"/>
+          </a:solidFill>
+          <a:ln w="12700">
+            <a:solidFill>
+              <a:srgbClr val="F2B880"/>
+            </a:solidFill>
+          </a:ln>
+          <a:effectLst/>
+        </p:spPr>
+        <p:txBody>
+          <a:bodyPr rtlCol="0" anchor="ctr"/>
+          <a:lstStyle/>
+          <a:p>
+            <a:pPr algn="ctr"/>
+          </a:p>
+        </p:txBody>
+      </p:sp>
+      <p:sp>
+        <p:nvSpPr>
+          <p:cNvPr id="56" name="C1-E28 text 54" descr="sci-ppt:o054"/>
+          <p:cNvSpPr txBox="1"/>
+          <p:nvPr/>
+        </p:nvSpPr>
+        <p:spPr>
+          <a:xfrm>
+            <a:off x="6336792" y="3840480"/>
+            <a:ext cx="228600" cy="247142"/>
+          </a:xfrm>
+          <a:prstGeom prst="rect">
+            <a:avLst/>
+          </a:prstGeom>
+          <a:noFill/>
+          <a:effectLst/>
+        </p:spPr>
+        <p:txBody>
+          <a:bodyPr wrap="none" lIns="18288" rIns="18288" tIns="18288" bIns="18288" anchor="t">
+            <a:spAutoFit/>
+          </a:bodyPr>
+          <a:lstStyle/>
+          <a:p>
+            <a:pPr algn="ctr">
+              <a:spcAft>
+                <a:spcPts val="0"/>
+              </a:spcAft>
+            </a:pPr>
+            <a:r>
+              <a:rPr sz="1300" b="1" i="0">
+                <a:solidFill>
+                  <a:srgbClr val="142632"/>
+                </a:solidFill>
+                <a:latin typeface="Arial"/>
+              </a:rPr>
+              <a:t>3</a:t>
+            </a:r>
+          </a:p>
+        </p:txBody>
+      </p:sp>
+      <p:sp>
+        <p:nvSpPr>
+          <p:cNvPr id="57" name="C1-E28 text 55" descr="sci-ppt:o055"/>
+          <p:cNvSpPr txBox="1"/>
+          <p:nvPr/>
+        </p:nvSpPr>
+        <p:spPr>
+          <a:xfrm>
+            <a:off x="6858000" y="3639312"/>
+            <a:ext cx="4892040" cy="247142"/>
+          </a:xfrm>
+          <a:prstGeom prst="rect">
+            <a:avLst/>
+          </a:prstGeom>
+          <a:noFill/>
+          <a:effectLst/>
+        </p:spPr>
+        <p:txBody>
+          <a:bodyPr wrap="none" lIns="18288" rIns="18288" tIns="18288" bIns="18288" anchor="t">
+            <a:spAutoFit/>
+          </a:bodyPr>
+          <a:lstStyle/>
+          <a:p>
+            <a:pPr algn="l">
+              <a:spcAft>
+                <a:spcPts val="0"/>
+              </a:spcAft>
+            </a:pPr>
+            <a:r>
+              <a:rPr sz="1300" b="1" i="0">
+                <a:solidFill>
+                  <a:srgbClr val="F2B880"/>
+                </a:solidFill>
+                <a:latin typeface="Arial"/>
+              </a:rPr>
+              <a:t>Advect: dX/dt = u(X, t)</a:t>
+            </a:r>
+          </a:p>
+        </p:txBody>
+      </p:sp>
+      <p:sp>
+        <p:nvSpPr>
+          <p:cNvPr id="58" name="C1-E28 text 56" descr="sci-ppt:o056"/>
+          <p:cNvSpPr txBox="1"/>
+          <p:nvPr/>
+        </p:nvSpPr>
+        <p:spPr>
+          <a:xfrm>
+            <a:off x="6858000" y="4023360"/>
+            <a:ext cx="4892040" cy="223900"/>
+          </a:xfrm>
+          <a:prstGeom prst="rect">
+            <a:avLst/>
+          </a:prstGeom>
+          <a:noFill/>
+          <a:effectLst/>
+        </p:spPr>
+        <p:txBody>
+          <a:bodyPr wrap="none" lIns="18288" rIns="18288" tIns="18288" bIns="18288" anchor="t">
+            <a:spAutoFit/>
+          </a:bodyPr>
+          <a:lstStyle/>
+          <a:p>
+            <a:pPr algn="l">
+              <a:spcAft>
+                <a:spcPts val="0"/>
+              </a:spcAft>
+            </a:pPr>
+            <a:r>
+              <a:rPr sz="1150" b="0" i="0">
+                <a:solidFill>
+                  <a:srgbClr val="E7F0F3"/>
+                </a:solidFill>
+                <a:latin typeface="Arial"/>
+              </a:rPr>
+              <a:t>new shape Γ(t + dt), new curvature κ</a:t>
+            </a:r>
+          </a:p>
+        </p:txBody>
+      </p:sp>
+      <p:cxnSp>
+        <p:nvCxnSpPr>
+          <p:cNvPr id="59" name="C1-E28 arrow 57" descr="sci-ppt:o057"/>
+          <p:cNvCxnSpPr/>
+          <p:nvPr/>
+        </p:nvCxnSpPr>
+        <p:spPr>
+          <a:xfrm>
+            <a:off x="8961120" y="4480560"/>
+            <a:ext cx="0" cy="182880"/>
+          </a:xfrm>
+          <a:prstGeom prst="line">
+            <a:avLst/>
+          </a:prstGeom>
+          <a:ln w="25400">
+            <a:solidFill>
+              <a:srgbClr val="B4C7D2"/>
+            </a:solidFill>
+            <a:headEnd type="none" w="med" len="med"/>
+            <a:tailEnd type="triangle" w="med" len="med"/>
+          </a:ln>
+          <a:effectLst/>
+        </p:spPr>
+      </p:cxnSp>
+      <p:sp>
+        <p:nvSpPr>
+          <p:cNvPr id="60" name="C1-E28 round_rect 58" descr="sci-ppt:o058"/>
+          <p:cNvSpPr/>
+          <p:nvPr/>
+        </p:nvSpPr>
+        <p:spPr>
+          <a:xfrm>
+            <a:off x="6126480" y="4663440"/>
+            <a:ext cx="5715000" cy="914400"/>
+          </a:xfrm>
+          <a:prstGeom prst="roundRect">
+            <a:avLst/>
+          </a:prstGeom>
+          <a:solidFill>
+            <a:srgbClr val="213E4B"/>
+          </a:solidFill>
+          <a:ln w="20320">
+            <a:solidFill>
+              <a:srgbClr val="F28BA0"/>
+            </a:solidFill>
+          </a:ln>
+          <a:effectLst/>
+        </p:spPr>
+        <p:txBody>
+          <a:bodyPr rtlCol="0" anchor="ctr"/>
+          <a:lstStyle/>
+          <a:p>
+            <a:pPr algn="ctr"/>
+          </a:p>
+        </p:txBody>
+      </p:sp>
+      <p:sp>
+        <p:nvSpPr>
+          <p:cNvPr id="61" name="C1-E28 ellipse 59" descr="sci-ppt:o059"/>
+          <p:cNvSpPr/>
+          <p:nvPr/>
+        </p:nvSpPr>
+        <p:spPr>
+          <a:xfrm>
+            <a:off x="6227064" y="4901184"/>
+            <a:ext cx="438912" cy="438912"/>
+          </a:xfrm>
+          <a:prstGeom prst="ellipse">
+            <a:avLst/>
+          </a:prstGeom>
+          <a:solidFill>
+            <a:srgbClr val="F28BA0"/>
+          </a:solidFill>
+          <a:ln w="12700">
+            <a:solidFill>
+              <a:srgbClr val="F28BA0"/>
+            </a:solidFill>
+          </a:ln>
+          <a:effectLst/>
+        </p:spPr>
+        <p:txBody>
+          <a:bodyPr rtlCol="0" anchor="ctr"/>
+          <a:lstStyle/>
+          <a:p>
+            <a:pPr algn="ctr"/>
+          </a:p>
+        </p:txBody>
+      </p:sp>
+      <p:sp>
+        <p:nvSpPr>
+          <p:cNvPr id="62" name="C1-E28 text 60" descr="sci-ppt:o060"/>
+          <p:cNvSpPr txBox="1"/>
+          <p:nvPr/>
+        </p:nvSpPr>
+        <p:spPr>
+          <a:xfrm>
+            <a:off x="6336792" y="4937760"/>
+            <a:ext cx="228600" cy="247142"/>
+          </a:xfrm>
+          <a:prstGeom prst="rect">
+            <a:avLst/>
+          </a:prstGeom>
+          <a:noFill/>
+          <a:effectLst/>
+        </p:spPr>
+        <p:txBody>
+          <a:bodyPr wrap="none" lIns="18288" rIns="18288" tIns="18288" bIns="18288" anchor="t">
+            <a:spAutoFit/>
+          </a:bodyPr>
+          <a:lstStyle/>
+          <a:p>
+            <a:pPr algn="ctr">
+              <a:spcAft>
+                <a:spcPts val="0"/>
+              </a:spcAft>
+            </a:pPr>
+            <a:r>
+              <a:rPr sz="1300" b="1" i="0">
+                <a:solidFill>
+                  <a:srgbClr val="142632"/>
+                </a:solidFill>
+                <a:latin typeface="Arial"/>
+              </a:rPr>
+              <a:t>4</a:t>
+            </a:r>
+          </a:p>
+        </p:txBody>
+      </p:sp>
+      <p:sp>
+        <p:nvSpPr>
+          <p:cNvPr id="63" name="C1-E28 text 61" descr="sci-ppt:o061"/>
+          <p:cNvSpPr txBox="1"/>
+          <p:nvPr/>
+        </p:nvSpPr>
+        <p:spPr>
+          <a:xfrm>
+            <a:off x="6858000" y="4736592"/>
+            <a:ext cx="4892040" cy="247142"/>
           </a:xfrm>
           <a:prstGeom prst="rect">
             <a:avLst/>
@@ -3451,21 +5136,21 @@
                 </a:solidFill>
                 <a:latin typeface="Arial"/>
               </a:rPr>
-              <a:t>n: liquid → gas</a:t>
-            </a:r>
-          </a:p>
-        </p:txBody>
-      </p:sp>
-      <p:sp>
-        <p:nvSpPr>
-          <p:cNvPr id="14" name="C1-E28 text 12" descr="sci-ppt:o012"/>
+              <a:t>Update φ on Γ</a:t>
+            </a:r>
+          </a:p>
+        </p:txBody>
+      </p:sp>
+      <p:sp>
+        <p:nvSpPr>
+          <p:cNvPr id="64" name="C1-E28 text 62" descr="sci-ppt:o062"/>
           <p:cNvSpPr txBox="1"/>
           <p:nvPr/>
         </p:nvSpPr>
         <p:spPr>
           <a:xfrm>
-            <a:off x="4023360" y="2194560"/>
-            <a:ext cx="2377440" cy="247142"/>
+            <a:off x="6858000" y="5120640"/>
+            <a:ext cx="4892040" cy="223900"/>
           </a:xfrm>
           <a:prstGeom prst="rect">
             <a:avLst/>
@@ -3485,27 +5170,27 @@
               </a:spcAft>
             </a:pPr>
             <a:r>
-              <a:rPr sz="1300" b="1" i="0">
+              <a:rPr sz="1150" b="0" i="0">
                 <a:solidFill>
-                  <a:srgbClr val="7FC8F8"/>
+                  <a:srgbClr val="E7F0F3"/>
                 </a:solidFill>
                 <a:latin typeface="Arial"/>
               </a:rPr>
-              <a:t>s: tangent</a:t>
-            </a:r>
-          </a:p>
-        </p:txBody>
-      </p:sp>
-      <p:sp>
-        <p:nvSpPr>
-          <p:cNvPr id="15" name="C1-E28 text 13" descr="sci-ppt:o013"/>
+              <a:t>Dφ/Dt = ½|u|² + (p∞ − p_b − σκ)/ρ</a:t>
+            </a:r>
+          </a:p>
+        </p:txBody>
+      </p:sp>
+      <p:sp>
+        <p:nvSpPr>
+          <p:cNvPr id="65" name="C1-E28 text 63" descr="sci-ppt:o063"/>
           <p:cNvSpPr txBox="1"/>
           <p:nvPr/>
         </p:nvSpPr>
         <p:spPr>
           <a:xfrm>
-            <a:off x="502920" y="5257800"/>
-            <a:ext cx="4663440" cy="433070"/>
+            <a:off x="6126480" y="5806440"/>
+            <a:ext cx="5669280" cy="433070"/>
           </a:xfrm>
           <a:prstGeom prst="rect">
             <a:avLst/>
@@ -3527,11 +5212,11 @@
             <a:r>
               <a:rPr sz="1250" b="0" i="0">
                 <a:solidFill>
-                  <a:srgbClr val="E7F0F3"/>
+                  <a:srgbClr val="F2B880"/>
                 </a:solidFill>
                 <a:latin typeface="Arial"/>
               </a:rPr>
-              <a:t>For a bubble the normal points inward, so the sphere</a:t>
+              <a:t>The shape and the potential evolve together; changing geometry is</a:t>
             </a:r>
           </a:p>
           <a:p>
@@ -3543,570 +5228,18 @@
             <a:r>
               <a:rPr sz="1250" b="0" i="0">
                 <a:solidFill>
-                  <a:srgbClr val="E7F0F3"/>
-                </a:solidFill>
-                <a:latin typeface="Arial"/>
-              </a:rPr>
-              <a:t>curvature is κ = −2/R.</a:t>
-            </a:r>
-          </a:p>
-        </p:txBody>
-      </p:sp>
-      <p:sp>
-        <p:nvSpPr>
-          <p:cNvPr id="16" name="C1-E28 text 14" descr="sci-ppt:o014"/>
-          <p:cNvSpPr txBox="1"/>
-          <p:nvPr/>
-        </p:nvSpPr>
-        <p:spPr>
-          <a:xfrm>
-            <a:off x="5577840" y="914400"/>
-            <a:ext cx="6217920" cy="262636"/>
-          </a:xfrm>
-          <a:prstGeom prst="rect">
-            <a:avLst/>
-          </a:prstGeom>
-          <a:noFill/>
-          <a:effectLst/>
-        </p:spPr>
-        <p:txBody>
-          <a:bodyPr wrap="none" lIns="18288" rIns="18288" tIns="18288" bIns="18288" anchor="t">
-            <a:spAutoFit/>
-          </a:bodyPr>
-          <a:lstStyle/>
-          <a:p>
-            <a:pPr algn="l">
-              <a:spcAft>
-                <a:spcPts val="0"/>
-              </a:spcAft>
-            </a:pPr>
-            <a:r>
-              <a:rPr sz="1400" b="1" i="0">
-                <a:solidFill>
-                  <a:srgbClr val="8EDBD4"/>
-                </a:solidFill>
-                <a:latin typeface="Arial"/>
-              </a:rPr>
-              <a:t>Three conditions on the interface Γ</a:t>
-            </a:r>
-          </a:p>
-        </p:txBody>
-      </p:sp>
-      <p:sp>
-        <p:nvSpPr>
-          <p:cNvPr id="17" name="C1-E28 round_rect 15" descr="sci-ppt:o015"/>
-          <p:cNvSpPr/>
-          <p:nvPr/>
-        </p:nvSpPr>
-        <p:spPr>
-          <a:xfrm>
-            <a:off x="5577840" y="1417320"/>
-            <a:ext cx="6263640" cy="1325880"/>
-          </a:xfrm>
-          <a:prstGeom prst="roundRect">
-            <a:avLst/>
-          </a:prstGeom>
-          <a:solidFill>
-            <a:srgbClr val="213E4B"/>
-          </a:solidFill>
-          <a:ln w="20320">
-            <a:solidFill>
-              <a:srgbClr val="B4C7D2"/>
-            </a:solidFill>
-          </a:ln>
-          <a:effectLst/>
-        </p:spPr>
-        <p:txBody>
-          <a:bodyPr rtlCol="0" anchor="ctr"/>
-          <a:lstStyle/>
-          <a:p>
-            <a:pPr algn="ctr"/>
-          </a:p>
-        </p:txBody>
-      </p:sp>
-      <p:sp>
-        <p:nvSpPr>
-          <p:cNvPr id="18" name="C1-E28 text 16" descr="sci-ppt:o016"/>
-          <p:cNvSpPr txBox="1"/>
-          <p:nvPr/>
-        </p:nvSpPr>
-        <p:spPr>
-          <a:xfrm>
-            <a:off x="5715000" y="1472184"/>
-            <a:ext cx="5943600" cy="247142"/>
-          </a:xfrm>
-          <a:prstGeom prst="rect">
-            <a:avLst/>
-          </a:prstGeom>
-          <a:noFill/>
-          <a:effectLst/>
-        </p:spPr>
-        <p:txBody>
-          <a:bodyPr wrap="none" lIns="18288" rIns="18288" tIns="18288" bIns="18288" anchor="t">
-            <a:spAutoFit/>
-          </a:bodyPr>
-          <a:lstStyle/>
-          <a:p>
-            <a:pPr algn="l">
-              <a:spcAft>
-                <a:spcPts val="0"/>
-              </a:spcAft>
-            </a:pPr>
-            <a:r>
-              <a:rPr sz="1300" b="1" i="0">
-                <a:solidFill>
                   <a:srgbClr val="F2B880"/>
                 </a:solidFill>
                 <a:latin typeface="Arial"/>
               </a:rPr>
-              <a:t>Kinematic</a:t>
-            </a:r>
-          </a:p>
-        </p:txBody>
-      </p:sp>
-      <p:sp>
-        <p:nvSpPr>
-          <p:cNvPr id="19" name="C1-E28 text 17" descr="sci-ppt:o017"/>
-          <p:cNvSpPr txBox="1"/>
-          <p:nvPr/>
-        </p:nvSpPr>
-        <p:spPr>
-          <a:xfrm>
-            <a:off x="5715000" y="1828800"/>
-            <a:ext cx="5943600" cy="262636"/>
-          </a:xfrm>
-          <a:prstGeom prst="rect">
-            <a:avLst/>
-          </a:prstGeom>
-          <a:noFill/>
-          <a:effectLst/>
-        </p:spPr>
-        <p:txBody>
-          <a:bodyPr wrap="none" lIns="18288" rIns="18288" tIns="18288" bIns="18288" anchor="t">
-            <a:spAutoFit/>
-          </a:bodyPr>
-          <a:lstStyle/>
-          <a:p>
-            <a:pPr algn="l">
-              <a:spcAft>
-                <a:spcPts val="0"/>
-              </a:spcAft>
-            </a:pPr>
-            <a:r>
-              <a:rPr sz="1400" b="1" i="0">
-                <a:solidFill>
-                  <a:srgbClr val="E7F0F3"/>
-                </a:solidFill>
-                <a:latin typeface="Arial"/>
-              </a:rPr>
-              <a:t>Vₙ = u · n</a:t>
-            </a:r>
-          </a:p>
-        </p:txBody>
-      </p:sp>
-      <p:sp>
-        <p:nvSpPr>
-          <p:cNvPr id="20" name="C1-E28 text 18" descr="sci-ppt:o018"/>
-          <p:cNvSpPr txBox="1"/>
-          <p:nvPr/>
-        </p:nvSpPr>
-        <p:spPr>
-          <a:xfrm>
-            <a:off x="5715000" y="2286000"/>
-            <a:ext cx="5943600" cy="231648"/>
-          </a:xfrm>
-          <a:prstGeom prst="rect">
-            <a:avLst/>
-          </a:prstGeom>
-          <a:noFill/>
-          <a:effectLst/>
-        </p:spPr>
-        <p:txBody>
-          <a:bodyPr wrap="none" lIns="18288" rIns="18288" tIns="18288" bIns="18288" anchor="t">
-            <a:spAutoFit/>
-          </a:bodyPr>
-          <a:lstStyle/>
-          <a:p>
-            <a:pPr algn="l">
-              <a:spcAft>
-                <a:spcPts val="0"/>
-              </a:spcAft>
-            </a:pPr>
-            <a:r>
-              <a:rPr sz="1200" b="0" i="0">
-                <a:solidFill>
-                  <a:srgbClr val="B4C7D2"/>
-                </a:solidFill>
-                <a:latin typeface="Arial"/>
-              </a:rPr>
-              <a:t>the surface moves with the liquid normal to itself</a:t>
-            </a:r>
-          </a:p>
-        </p:txBody>
-      </p:sp>
-      <p:sp>
-        <p:nvSpPr>
-          <p:cNvPr id="21" name="C1-E28 round_rect 19" descr="sci-ppt:o019"/>
-          <p:cNvSpPr/>
-          <p:nvPr/>
-        </p:nvSpPr>
-        <p:spPr>
-          <a:xfrm>
-            <a:off x="5577840" y="2880360"/>
-            <a:ext cx="6263640" cy="1325880"/>
-          </a:xfrm>
-          <a:prstGeom prst="roundRect">
-            <a:avLst/>
-          </a:prstGeom>
-          <a:solidFill>
-            <a:srgbClr val="213E4B"/>
-          </a:solidFill>
-          <a:ln w="20320">
-            <a:solidFill>
-              <a:srgbClr val="B4C7D2"/>
-            </a:solidFill>
-          </a:ln>
-          <a:effectLst/>
-        </p:spPr>
-        <p:txBody>
-          <a:bodyPr rtlCol="0" anchor="ctr"/>
-          <a:lstStyle/>
-          <a:p>
-            <a:pPr algn="ctr"/>
-          </a:p>
-        </p:txBody>
-      </p:sp>
-      <p:sp>
-        <p:nvSpPr>
-          <p:cNvPr id="22" name="C1-E28 text 20" descr="sci-ppt:o020"/>
-          <p:cNvSpPr txBox="1"/>
-          <p:nvPr/>
-        </p:nvSpPr>
-        <p:spPr>
-          <a:xfrm>
-            <a:off x="5715000" y="2935224"/>
-            <a:ext cx="5943600" cy="247142"/>
-          </a:xfrm>
-          <a:prstGeom prst="rect">
-            <a:avLst/>
-          </a:prstGeom>
-          <a:noFill/>
-          <a:effectLst/>
-        </p:spPr>
-        <p:txBody>
-          <a:bodyPr wrap="none" lIns="18288" rIns="18288" tIns="18288" bIns="18288" anchor="t">
-            <a:spAutoFit/>
-          </a:bodyPr>
-          <a:lstStyle/>
-          <a:p>
-            <a:pPr algn="l">
-              <a:spcAft>
-                <a:spcPts val="0"/>
-              </a:spcAft>
-            </a:pPr>
-            <a:r>
-              <a:rPr sz="1300" b="1" i="0">
-                <a:solidFill>
-                  <a:srgbClr val="F2B880"/>
-                </a:solidFill>
-                <a:latin typeface="Arial"/>
-              </a:rPr>
-              <a:t>Normal stress</a:t>
-            </a:r>
-          </a:p>
-        </p:txBody>
-      </p:sp>
-      <p:sp>
-        <p:nvSpPr>
-          <p:cNvPr id="23" name="C1-E28 text 21" descr="sci-ppt:o021"/>
-          <p:cNvSpPr txBox="1"/>
-          <p:nvPr/>
-        </p:nvSpPr>
-        <p:spPr>
-          <a:xfrm>
-            <a:off x="5715000" y="3291840"/>
-            <a:ext cx="5943600" cy="262636"/>
-          </a:xfrm>
-          <a:prstGeom prst="rect">
-            <a:avLst/>
-          </a:prstGeom>
-          <a:noFill/>
-          <a:effectLst/>
-        </p:spPr>
-        <p:txBody>
-          <a:bodyPr wrap="none" lIns="18288" rIns="18288" tIns="18288" bIns="18288" anchor="t">
-            <a:spAutoFit/>
-          </a:bodyPr>
-          <a:lstStyle/>
-          <a:p>
-            <a:pPr algn="l">
-              <a:spcAft>
-                <a:spcPts val="0"/>
-              </a:spcAft>
-            </a:pPr>
-            <a:r>
-              <a:rPr sz="1400" b="1" i="0">
-                <a:solidFill>
-                  <a:srgbClr val="E7F0F3"/>
-                </a:solidFill>
-                <a:latin typeface="Arial"/>
-              </a:rPr>
-              <a:t>pₗ = p_b + σκ + 2μ n·D·n</a:t>
-            </a:r>
-          </a:p>
-        </p:txBody>
-      </p:sp>
-      <p:sp>
-        <p:nvSpPr>
-          <p:cNvPr id="24" name="C1-E28 text 22" descr="sci-ppt:o022"/>
-          <p:cNvSpPr txBox="1"/>
-          <p:nvPr/>
-        </p:nvSpPr>
-        <p:spPr>
-          <a:xfrm>
-            <a:off x="5715000" y="3749040"/>
-            <a:ext cx="5943600" cy="231648"/>
-          </a:xfrm>
-          <a:prstGeom prst="rect">
-            <a:avLst/>
-          </a:prstGeom>
-          <a:noFill/>
-          <a:effectLst/>
-        </p:spPr>
-        <p:txBody>
-          <a:bodyPr wrap="none" lIns="18288" rIns="18288" tIns="18288" bIns="18288" anchor="t">
-            <a:spAutoFit/>
-          </a:bodyPr>
-          <a:lstStyle/>
-          <a:p>
-            <a:pPr algn="l">
-              <a:spcAft>
-                <a:spcPts val="0"/>
-              </a:spcAft>
-            </a:pPr>
-            <a:r>
-              <a:rPr sz="1200" b="0" i="0">
-                <a:solidFill>
-                  <a:srgbClr val="B4C7D2"/>
-                </a:solidFill>
-                <a:latin typeface="Arial"/>
-              </a:rPr>
-              <a:t>σκ = −2σ/R for a sphere</a:t>
-            </a:r>
-          </a:p>
-        </p:txBody>
-      </p:sp>
-      <p:sp>
-        <p:nvSpPr>
-          <p:cNvPr id="25" name="C1-E28 round_rect 23" descr="sci-ppt:o023"/>
-          <p:cNvSpPr/>
-          <p:nvPr/>
-        </p:nvSpPr>
-        <p:spPr>
-          <a:xfrm>
-            <a:off x="5577840" y="4343400"/>
-            <a:ext cx="6263640" cy="1325880"/>
-          </a:xfrm>
-          <a:prstGeom prst="roundRect">
-            <a:avLst/>
-          </a:prstGeom>
-          <a:solidFill>
-            <a:srgbClr val="213E4B"/>
-          </a:solidFill>
-          <a:ln w="20320">
-            <a:solidFill>
-              <a:srgbClr val="B4C7D2"/>
-            </a:solidFill>
-          </a:ln>
-          <a:effectLst/>
-        </p:spPr>
-        <p:txBody>
-          <a:bodyPr rtlCol="0" anchor="ctr"/>
-          <a:lstStyle/>
-          <a:p>
-            <a:pPr algn="ctr"/>
-          </a:p>
-        </p:txBody>
-      </p:sp>
-      <p:sp>
-        <p:nvSpPr>
-          <p:cNvPr id="26" name="C1-E28 text 24" descr="sci-ppt:o024"/>
-          <p:cNvSpPr txBox="1"/>
-          <p:nvPr/>
-        </p:nvSpPr>
-        <p:spPr>
-          <a:xfrm>
-            <a:off x="5715000" y="4398264"/>
-            <a:ext cx="5943600" cy="247142"/>
-          </a:xfrm>
-          <a:prstGeom prst="rect">
-            <a:avLst/>
-          </a:prstGeom>
-          <a:noFill/>
-          <a:effectLst/>
-        </p:spPr>
-        <p:txBody>
-          <a:bodyPr wrap="none" lIns="18288" rIns="18288" tIns="18288" bIns="18288" anchor="t">
-            <a:spAutoFit/>
-          </a:bodyPr>
-          <a:lstStyle/>
-          <a:p>
-            <a:pPr algn="l">
-              <a:spcAft>
-                <a:spcPts val="0"/>
-              </a:spcAft>
-            </a:pPr>
-            <a:r>
-              <a:rPr sz="1300" b="1" i="0">
-                <a:solidFill>
-                  <a:srgbClr val="F2B880"/>
-                </a:solidFill>
-                <a:latin typeface="Arial"/>
-              </a:rPr>
-              <a:t>Tangential stress</a:t>
-            </a:r>
-          </a:p>
-        </p:txBody>
-      </p:sp>
-      <p:sp>
-        <p:nvSpPr>
-          <p:cNvPr id="27" name="C1-E28 text 25" descr="sci-ppt:o025"/>
-          <p:cNvSpPr txBox="1"/>
-          <p:nvPr/>
-        </p:nvSpPr>
-        <p:spPr>
-          <a:xfrm>
-            <a:off x="5715000" y="4754880"/>
-            <a:ext cx="5943600" cy="262636"/>
-          </a:xfrm>
-          <a:prstGeom prst="rect">
-            <a:avLst/>
-          </a:prstGeom>
-          <a:noFill/>
-          <a:effectLst/>
-        </p:spPr>
-        <p:txBody>
-          <a:bodyPr wrap="none" lIns="18288" rIns="18288" tIns="18288" bIns="18288" anchor="t">
-            <a:spAutoFit/>
-          </a:bodyPr>
-          <a:lstStyle/>
-          <a:p>
-            <a:pPr algn="l">
-              <a:spcAft>
-                <a:spcPts val="0"/>
-              </a:spcAft>
-            </a:pPr>
-            <a:r>
-              <a:rPr sz="1400" b="1" i="0">
-                <a:solidFill>
-                  <a:srgbClr val="E7F0F3"/>
-                </a:solidFill>
-                <a:latin typeface="Arial"/>
-              </a:rPr>
-              <a:t>2μ s·D·n = 0</a:t>
-            </a:r>
-          </a:p>
-        </p:txBody>
-      </p:sp>
-      <p:sp>
-        <p:nvSpPr>
-          <p:cNvPr id="28" name="C1-E28 text 26" descr="sci-ppt:o026"/>
-          <p:cNvSpPr txBox="1"/>
-          <p:nvPr/>
-        </p:nvSpPr>
-        <p:spPr>
-          <a:xfrm>
-            <a:off x="5715000" y="5212080"/>
-            <a:ext cx="5943600" cy="231648"/>
-          </a:xfrm>
-          <a:prstGeom prst="rect">
-            <a:avLst/>
-          </a:prstGeom>
-          <a:noFill/>
-          <a:effectLst/>
-        </p:spPr>
-        <p:txBody>
-          <a:bodyPr wrap="none" lIns="18288" rIns="18288" tIns="18288" bIns="18288" anchor="t">
-            <a:spAutoFit/>
-          </a:bodyPr>
-          <a:lstStyle/>
-          <a:p>
-            <a:pPr algn="l">
-              <a:spcAft>
-                <a:spcPts val="0"/>
-              </a:spcAft>
-            </a:pPr>
-            <a:r>
-              <a:rPr sz="1200" b="0" i="0">
-                <a:solidFill>
-                  <a:srgbClr val="B4C7D2"/>
-                </a:solidFill>
-                <a:latin typeface="Arial"/>
-              </a:rPr>
-              <a:t>gas cannot support shear</a:t>
-            </a:r>
-          </a:p>
-        </p:txBody>
-      </p:sp>
-      <p:sp>
-        <p:nvSpPr>
-          <p:cNvPr id="29" name="C1-E28 text 27" descr="sci-ppt:o027"/>
-          <p:cNvSpPr txBox="1"/>
-          <p:nvPr/>
-        </p:nvSpPr>
-        <p:spPr>
-          <a:xfrm>
-            <a:off x="5577840" y="5806440"/>
-            <a:ext cx="6217920" cy="433070"/>
-          </a:xfrm>
-          <a:prstGeom prst="rect">
-            <a:avLst/>
-          </a:prstGeom>
-          <a:noFill/>
-          <a:effectLst/>
-        </p:spPr>
-        <p:txBody>
-          <a:bodyPr wrap="none" lIns="18288" rIns="18288" tIns="18288" bIns="18288" anchor="t">
-            <a:spAutoFit/>
-          </a:bodyPr>
-          <a:lstStyle/>
-          <a:p>
-            <a:pPr algn="l">
-              <a:spcAft>
-                <a:spcPts val="0"/>
-              </a:spcAft>
-            </a:pPr>
-            <a:r>
-              <a:rPr sz="1250" b="0" i="0">
-                <a:solidFill>
-                  <a:srgbClr val="E7F0F3"/>
-                </a:solidFill>
-                <a:latin typeface="Arial"/>
-              </a:rPr>
-              <a:t>One sign convention for n, κ and D is required, or the terms cancel</a:t>
-            </a:r>
-          </a:p>
-          <a:p>
-            <a:pPr algn="l">
-              <a:spcAft>
-                <a:spcPts val="0"/>
-              </a:spcAft>
-            </a:pPr>
-            <a:r>
-              <a:rPr sz="1250" b="0" i="0">
-                <a:solidFill>
-                  <a:srgbClr val="E7F0F3"/>
-                </a:solidFill>
-                <a:latin typeface="Arial"/>
-              </a:rPr>
-              <a:t>wrongly.</a:t>
-            </a:r>
-          </a:p>
-        </p:txBody>
-      </p:sp>
-      <p:sp>
-        <p:nvSpPr>
-          <p:cNvPr id="30" name="C1-E28 text 28" descr="sci-ppt:o028"/>
+              <a:t>what creates focusing.</a:t>
+            </a:r>
+          </a:p>
+        </p:txBody>
+      </p:sp>
+      <p:sp>
+        <p:nvSpPr>
+          <p:cNvPr id="66" name="C1-E28 text 64" descr="sci-ppt:o064"/>
           <p:cNvSpPr txBox="1"/>
           <p:nvPr/>
         </p:nvSpPr>
@@ -4139,7 +5272,7 @@
                 </a:solidFill>
                 <a:latin typeface="Arial"/>
               </a:rPr>
-              <a:t>D = ½(∇u + ∇uᵀ) is the strain-rate tensor (Eq. C1-E28).</a:t>
+              <a:t>Schematic of the loop of Eq. C1-E28; the deformed shape is illustrative.</a:t>
             </a:r>
           </a:p>
         </p:txBody>
